--- a/public/Vyapar_2.0_Presentation.pptx
+++ b/public/Vyapar_2.0_Presentation.pptx
@@ -3146,8 +3146,8 @@
         </p:nvSpPr>
         <p:spPr>
           <a:xfrm>
-            <a:off x="731520" y="731520"/>
-            <a:ext cx="5669280" cy="5303520"/>
+            <a:off x="731520" y="640080"/>
+            <a:ext cx="5852160" cy="3291840"/>
           </a:xfrm>
           <a:prstGeom prst="rect">
             <a:avLst/>
@@ -3161,7 +3161,7 @@
           <a:lstStyle/>
           <a:p>
             <a:pPr>
-              <a:defRPr sz="1200" b="1">
+              <a:defRPr sz="1100" b="1">
                 <a:solidFill>
                   <a:srgbClr val="6366F1"/>
                 </a:solidFill>
@@ -3170,6 +3170,22 @@
             </a:pPr>
             <a:r>
               <a:t>ENTERPRISE 2.0 RELEASE</a:t>
+            </a:r>
+          </a:p>
+          <a:p>
+            <a:pPr>
+              <a:spcBef>
+                <a:spcPts val="800"/>
+              </a:spcBef>
+              <a:defRPr sz="4400" b="1">
+                <a:solidFill>
+                  <a:srgbClr val="FFFFFF"/>
+                </a:solidFill>
+                <a:latin typeface="Arial"/>
+              </a:defRPr>
+            </a:pPr>
+            <a:r>
+              <a:t>VYAPAR 2.0</a:t>
             </a:r>
           </a:p>
           <a:p>
@@ -3177,15 +3193,15 @@
               <a:spcBef>
                 <a:spcPts val="1000"/>
               </a:spcBef>
-              <a:defRPr sz="4400" b="1">
-                <a:solidFill>
-                  <a:srgbClr val="FFFFFF"/>
-                </a:solidFill>
-                <a:latin typeface="Arial"/>
-              </a:defRPr>
-            </a:pPr>
-            <a:r>
-              <a:t>VYAPAR 2.0</a:t>
+              <a:defRPr sz="1500">
+                <a:solidFill>
+                  <a:srgbClr val="CBD5E1"/>
+                </a:solidFill>
+                <a:latin typeface="Arial"/>
+              </a:defRPr>
+            </a:pPr>
+            <a:r>
+              <a:t>Smart Accounting, Inventory &amp; Real-Time Delivery Operating System for Modern Indian Merchants.</a:t>
             </a:r>
           </a:p>
           <a:p>
@@ -3193,22 +3209,6 @@
               <a:spcBef>
                 <a:spcPts val="1200"/>
               </a:spcBef>
-              <a:defRPr sz="1600">
-                <a:solidFill>
-                  <a:srgbClr val="CBD5E1"/>
-                </a:solidFill>
-                <a:latin typeface="Arial"/>
-              </a:defRPr>
-            </a:pPr>
-            <a:r>
-              <a:t>Smart Accounting, Inventory &amp; Real-Time Delivery Operating System for Modern Indian Merchants.</a:t>
-            </a:r>
-          </a:p>
-          <a:p>
-            <a:pPr>
-              <a:spcBef>
-                <a:spcPts val="1800"/>
-              </a:spcBef>
               <a:defRPr sz="1100" b="1">
                 <a:solidFill>
                   <a:srgbClr val="06B6D4"/>
@@ -3217,7 +3217,7 @@
               </a:defRPr>
             </a:pPr>
             <a:r>
-              <a:t>⚡ Real-Time GPS Tracking  |  🧾 GST Invoices &amp; POS  |  📦 Barcode Engine  |  📒 Digital Khata</a:t>
+              <a:t>⚡ Real-Time GPS  |  🧾 GST POS  |  📦 Barcodes  |  📒 Digital Khata</a:t>
             </a:r>
           </a:p>
         </p:txBody>
@@ -3230,8 +3230,8 @@
         </p:nvSpPr>
         <p:spPr>
           <a:xfrm>
-            <a:off x="731520" y="3931920"/>
-            <a:ext cx="5303520" cy="2103120"/>
+            <a:off x="731520" y="4114800"/>
+            <a:ext cx="5669280" cy="2103120"/>
           </a:xfrm>
           <a:prstGeom prst="roundRect">
             <a:avLst/>
@@ -3260,7 +3260,7 @@
           </a:fontRef>
         </p:style>
         <p:txBody>
-          <a:bodyPr rtlCol="0" anchor="ctr" lIns="274320" tIns="182880"/>
+          <a:bodyPr rtlCol="0" anchor="ctr" lIns="274320" tIns="164592"/>
           <a:lstStyle/>
           <a:p>
             <a:pPr algn="ctr">
@@ -3357,8 +3357,8 @@
         </p:blipFill>
         <p:spPr>
           <a:xfrm>
-            <a:off x="6400800" y="1005840"/>
-            <a:ext cx="5029200" cy="2806995"/>
+            <a:off x="6675120" y="1005840"/>
+            <a:ext cx="4846320" cy="2704923"/>
           </a:xfrm>
           <a:prstGeom prst="rect">
             <a:avLst/>
@@ -3435,7 +3435,7 @@
         <p:spPr>
           <a:xfrm>
             <a:off x="731520" y="365760"/>
-            <a:ext cx="4114800" cy="365760"/>
+            <a:ext cx="5486400" cy="320040"/>
           </a:xfrm>
           <a:prstGeom prst="rect">
             <a:avLst/>
@@ -3470,8 +3470,8 @@
         </p:nvSpPr>
         <p:spPr>
           <a:xfrm>
-            <a:off x="731520" y="685800"/>
-            <a:ext cx="10515600" cy="731520"/>
+            <a:off x="731520" y="658368"/>
+            <a:ext cx="10515600" cy="640080"/>
           </a:xfrm>
           <a:prstGeom prst="rect">
             <a:avLst/>
@@ -3485,7 +3485,7 @@
           <a:lstStyle/>
           <a:p>
             <a:pPr>
-              <a:defRPr sz="2800" b="1">
+              <a:defRPr sz="2600" b="1">
                 <a:solidFill>
                   <a:srgbClr val="FFFFFF"/>
                 </a:solidFill>
@@ -3506,8 +3506,8 @@
         </p:nvSpPr>
         <p:spPr>
           <a:xfrm>
-            <a:off x="731520" y="1325880"/>
-            <a:ext cx="10515600" cy="457200"/>
+            <a:off x="731520" y="1261872"/>
+            <a:ext cx="10515600" cy="411480"/>
           </a:xfrm>
           <a:prstGeom prst="rect">
             <a:avLst/>
@@ -3521,7 +3521,7 @@
           <a:lstStyle/>
           <a:p>
             <a:pPr>
-              <a:defRPr sz="1300">
+              <a:defRPr sz="1200">
                 <a:solidFill>
                   <a:srgbClr val="94A3B8"/>
                 </a:solidFill>
@@ -3542,8 +3542,8 @@
         </p:nvSpPr>
         <p:spPr>
           <a:xfrm>
-            <a:off x="731520" y="2011680"/>
-            <a:ext cx="5120640" cy="2011680"/>
+            <a:off x="731520" y="1828800"/>
+            <a:ext cx="2926080" cy="2194560"/>
           </a:xfrm>
           <a:prstGeom prst="roundRect">
             <a:avLst/>
@@ -3572,11 +3572,11 @@
           </a:fontRef>
         </p:style>
         <p:txBody>
-          <a:bodyPr rtlCol="0" anchor="ctr" wrap="square" lIns="274320" rIns="274320" tIns="228600" bIns="228600"/>
+          <a:bodyPr rtlCol="0" anchor="ctr" wrap="square" lIns="182880" rIns="182880" tIns="137160" bIns="137160"/>
           <a:lstStyle/>
           <a:p>
             <a:pPr algn="ctr">
-              <a:defRPr sz="1600" b="1">
+              <a:defRPr sz="1300" b="1">
                 <a:solidFill>
                   <a:srgbClr val="FFFFFF"/>
                 </a:solidFill>
@@ -3590,9 +3590,9 @@
           <a:p>
             <a:pPr>
               <a:spcBef>
-                <a:spcPts val="800"/>
+                <a:spcPts val="300"/>
               </a:spcBef>
-              <a:defRPr sz="1200">
+              <a:defRPr sz="1050">
                 <a:solidFill>
                   <a:srgbClr val="CBD5E1"/>
                 </a:solidFill>
@@ -3600,7 +3600,7 @@
               </a:defRPr>
             </a:pPr>
             <a:r>
-              <a:t>Customer credit entries get lost, forgotten, or disputed. Manual phone calls for payment collection feel awkward and waste hours.</a:t>
+              <a:t>Credit entries get lost or disputed. Awkward manual calls for payments waste hours.</a:t>
             </a:r>
           </a:p>
         </p:txBody>
@@ -3613,8 +3613,8 @@
         </p:nvSpPr>
         <p:spPr>
           <a:xfrm>
-            <a:off x="6217920" y="2011680"/>
-            <a:ext cx="5120640" cy="2011680"/>
+            <a:off x="3840480" y="1828800"/>
+            <a:ext cx="2926080" cy="2194560"/>
           </a:xfrm>
           <a:prstGeom prst="roundRect">
             <a:avLst/>
@@ -3643,11 +3643,11 @@
           </a:fontRef>
         </p:style>
         <p:txBody>
-          <a:bodyPr rtlCol="0" anchor="ctr" wrap="square" lIns="274320" rIns="274320" tIns="228600" bIns="228600"/>
+          <a:bodyPr rtlCol="0" anchor="ctr" wrap="square" lIns="182880" rIns="182880" tIns="137160" bIns="137160"/>
           <a:lstStyle/>
           <a:p>
             <a:pPr algn="ctr">
-              <a:defRPr sz="1600" b="1">
+              <a:defRPr sz="1300" b="1">
                 <a:solidFill>
                   <a:srgbClr val="FFFFFF"/>
                 </a:solidFill>
@@ -3655,15 +3655,15 @@
               </a:defRPr>
             </a:pPr>
             <a:r>
-              <a:t>📦  Blind Inventory Control</a:t>
+              <a:t>📦  Blind Inventory</a:t>
             </a:r>
           </a:p>
           <a:p>
             <a:pPr>
               <a:spcBef>
-                <a:spcPts val="800"/>
+                <a:spcPts val="300"/>
               </a:spcBef>
-              <a:defRPr sz="1200">
+              <a:defRPr sz="1050">
                 <a:solidFill>
                   <a:srgbClr val="CBD5E1"/>
                 </a:solidFill>
@@ -3671,7 +3671,7 @@
               </a:defRPr>
             </a:pPr>
             <a:r>
-              <a:t>Popular items run out of stock without notice, while slow-moving items expire unnoticed in the back warehouse.</a:t>
+              <a:t>Stock runs out without notice, while slow items expire unnoticed in warehouses.</a:t>
             </a:r>
           </a:p>
         </p:txBody>
@@ -3684,8 +3684,8 @@
         </p:nvSpPr>
         <p:spPr>
           <a:xfrm>
-            <a:off x="731520" y="4297680"/>
-            <a:ext cx="5120640" cy="2011680"/>
+            <a:off x="731520" y="4206240"/>
+            <a:ext cx="2926080" cy="2194560"/>
           </a:xfrm>
           <a:prstGeom prst="roundRect">
             <a:avLst/>
@@ -3714,11 +3714,11 @@
           </a:fontRef>
         </p:style>
         <p:txBody>
-          <a:bodyPr rtlCol="0" anchor="ctr" wrap="square" lIns="274320" rIns="274320" tIns="228600" bIns="228600"/>
+          <a:bodyPr rtlCol="0" anchor="ctr" wrap="square" lIns="182880" rIns="182880" tIns="137160" bIns="137160"/>
           <a:lstStyle/>
           <a:p>
             <a:pPr algn="ctr">
-              <a:defRPr sz="1600" b="1">
+              <a:defRPr sz="1300" b="1">
                 <a:solidFill>
                   <a:srgbClr val="FFFFFF"/>
                 </a:solidFill>
@@ -3732,9 +3732,9 @@
           <a:p>
             <a:pPr>
               <a:spcBef>
-                <a:spcPts val="800"/>
+                <a:spcPts val="300"/>
               </a:spcBef>
-              <a:defRPr sz="1200">
+              <a:defRPr sz="1050">
                 <a:solidFill>
                   <a:srgbClr val="CBD5E1"/>
                 </a:solidFill>
@@ -3742,7 +3742,7 @@
               </a:defRPr>
             </a:pPr>
             <a:r>
-              <a:t>Typing prices by hand during peak rush hours creates long customer queues, manual calculation mistakes, and missed sales.</a:t>
+              <a:t>Manual pricing during rush hours creates billing errors and customer frustration.</a:t>
             </a:r>
           </a:p>
         </p:txBody>
@@ -3755,8 +3755,8 @@
         </p:nvSpPr>
         <p:spPr>
           <a:xfrm>
-            <a:off x="6217920" y="4297680"/>
-            <a:ext cx="5120640" cy="2011680"/>
+            <a:off x="3840480" y="4206240"/>
+            <a:ext cx="2926080" cy="2194560"/>
           </a:xfrm>
           <a:prstGeom prst="roundRect">
             <a:avLst/>
@@ -3785,11 +3785,11 @@
           </a:fontRef>
         </p:style>
         <p:txBody>
-          <a:bodyPr rtlCol="0" anchor="ctr" wrap="square" lIns="274320" rIns="274320" tIns="228600" bIns="228600"/>
+          <a:bodyPr rtlCol="0" anchor="ctr" wrap="square" lIns="182880" rIns="182880" tIns="137160" bIns="137160"/>
           <a:lstStyle/>
           <a:p>
             <a:pPr algn="ctr">
-              <a:defRPr sz="1600" b="1">
+              <a:defRPr sz="1300" b="1">
                 <a:solidFill>
                   <a:srgbClr val="FFFFFF"/>
                 </a:solidFill>
@@ -3803,9 +3803,9 @@
           <a:p>
             <a:pPr>
               <a:spcBef>
-                <a:spcPts val="800"/>
+                <a:spcPts val="300"/>
               </a:spcBef>
-              <a:defRPr sz="1200">
+              <a:defRPr sz="1050">
                 <a:solidFill>
                   <a:srgbClr val="CBD5E1"/>
                 </a:solidFill>
@@ -3813,11 +3813,35 @@
               </a:defRPr>
             </a:pPr>
             <a:r>
-              <a:t>Customers constantly call asking 'Where is my parcel?' Merchants have no idea where delivery drivers are located.</a:t>
-            </a:r>
-          </a:p>
-        </p:txBody>
-      </p:sp>
+              <a:t>Customers constantly ask 'Where is my order?' Merchants have no way to track drivers.</a:t>
+            </a:r>
+          </a:p>
+        </p:txBody>
+      </p:sp>
+      <p:pic>
+        <p:nvPicPr>
+          <p:cNvPr id="10" name="Picture 9" descr="problem.jpg"/>
+          <p:cNvPicPr>
+            <a:picLocks noChangeAspect="1"/>
+          </p:cNvPicPr>
+          <p:nvPr/>
+        </p:nvPicPr>
+        <p:blipFill>
+          <a:blip r:embed="rId2"/>
+          <a:stretch>
+            <a:fillRect/>
+          </a:stretch>
+        </p:blipFill>
+        <p:spPr>
+          <a:xfrm>
+            <a:off x="7040880" y="1828800"/>
+            <a:ext cx="4389120" cy="2449741"/>
+          </a:xfrm>
+          <a:prstGeom prst="rect">
+            <a:avLst/>
+          </a:prstGeom>
+        </p:spPr>
+      </p:pic>
     </p:spTree>
   </p:cSld>
   <p:clrMapOvr>
@@ -3888,7 +3912,7 @@
         <p:spPr>
           <a:xfrm>
             <a:off x="731520" y="365760"/>
-            <a:ext cx="4114800" cy="365760"/>
+            <a:ext cx="5486400" cy="320040"/>
           </a:xfrm>
           <a:prstGeom prst="rect">
             <a:avLst/>
@@ -3923,8 +3947,8 @@
         </p:nvSpPr>
         <p:spPr>
           <a:xfrm>
-            <a:off x="731520" y="685800"/>
-            <a:ext cx="10515600" cy="731520"/>
+            <a:off x="731520" y="658368"/>
+            <a:ext cx="10515600" cy="640080"/>
           </a:xfrm>
           <a:prstGeom prst="rect">
             <a:avLst/>
@@ -3938,7 +3962,7 @@
           <a:lstStyle/>
           <a:p>
             <a:pPr>
-              <a:defRPr sz="2800" b="1">
+              <a:defRPr sz="2600" b="1">
                 <a:solidFill>
                   <a:srgbClr val="FFFFFF"/>
                 </a:solidFill>
@@ -3959,8 +3983,8 @@
         </p:nvSpPr>
         <p:spPr>
           <a:xfrm>
-            <a:off x="731520" y="1325880"/>
-            <a:ext cx="10515600" cy="457200"/>
+            <a:off x="731520" y="1261872"/>
+            <a:ext cx="10515600" cy="411480"/>
           </a:xfrm>
           <a:prstGeom prst="rect">
             <a:avLst/>
@@ -3974,7 +3998,7 @@
           <a:lstStyle/>
           <a:p>
             <a:pPr>
-              <a:defRPr sz="1300">
+              <a:defRPr sz="1200">
                 <a:solidFill>
                   <a:srgbClr val="94A3B8"/>
                 </a:solidFill>
@@ -3995,8 +4019,8 @@
         </p:nvSpPr>
         <p:spPr>
           <a:xfrm>
-            <a:off x="731520" y="2011680"/>
-            <a:ext cx="5120640" cy="2011680"/>
+            <a:off x="731520" y="1828800"/>
+            <a:ext cx="2926080" cy="2194560"/>
           </a:xfrm>
           <a:prstGeom prst="roundRect">
             <a:avLst/>
@@ -4025,11 +4049,11 @@
           </a:fontRef>
         </p:style>
         <p:txBody>
-          <a:bodyPr rtlCol="0" anchor="ctr" wrap="square" lIns="274320" rIns="274320" tIns="228600" bIns="228600"/>
+          <a:bodyPr rtlCol="0" anchor="ctr" wrap="square" lIns="182880" rIns="182880" tIns="137160" bIns="137160"/>
           <a:lstStyle/>
           <a:p>
             <a:pPr algn="ctr">
-              <a:defRPr sz="1600" b="1">
+              <a:defRPr sz="1300" b="1">
                 <a:solidFill>
                   <a:srgbClr val="FFFFFF"/>
                 </a:solidFill>
@@ -4037,15 +4061,15 @@
               </a:defRPr>
             </a:pPr>
             <a:r>
-              <a:t>⚡  Instant GST Billing &amp; Thermal Slips</a:t>
+              <a:t>⚡  Instant GST Billing</a:t>
             </a:r>
           </a:p>
           <a:p>
             <a:pPr>
               <a:spcBef>
-                <a:spcPts val="800"/>
+                <a:spcPts val="300"/>
               </a:spcBef>
-              <a:defRPr sz="1200">
+              <a:defRPr sz="1050">
                 <a:solidFill>
                   <a:srgbClr val="CBD5E1"/>
                 </a:solidFill>
@@ -4053,7 +4077,7 @@
               </a:defRPr>
             </a:pPr>
             <a:r>
-              <a:t>Generate professional A4 Tax Invoices or instant 58mm/80mm counter POS thermal receipts with automated GST compliance.</a:t>
+              <a:t>Generate A4 Tax Invoices or instant 58mm/80mm counter thermal slips with automated GST calculations.</a:t>
             </a:r>
           </a:p>
         </p:txBody>
@@ -4066,8 +4090,8 @@
         </p:nvSpPr>
         <p:spPr>
           <a:xfrm>
-            <a:off x="6217920" y="2011680"/>
-            <a:ext cx="5120640" cy="2011680"/>
+            <a:off x="3840480" y="1828800"/>
+            <a:ext cx="2926080" cy="2194560"/>
           </a:xfrm>
           <a:prstGeom prst="roundRect">
             <a:avLst/>
@@ -4096,11 +4120,11 @@
           </a:fontRef>
         </p:style>
         <p:txBody>
-          <a:bodyPr rtlCol="0" anchor="ctr" wrap="square" lIns="274320" rIns="274320" tIns="228600" bIns="228600"/>
+          <a:bodyPr rtlCol="0" anchor="ctr" wrap="square" lIns="182880" rIns="182880" tIns="137160" bIns="137160"/>
           <a:lstStyle/>
           <a:p>
             <a:pPr algn="ctr">
-              <a:defRPr sz="1600" b="1">
+              <a:defRPr sz="1300" b="1">
                 <a:solidFill>
                   <a:srgbClr val="FFFFFF"/>
                 </a:solidFill>
@@ -4108,15 +4132,15 @@
               </a:defRPr>
             </a:pPr>
             <a:r>
-              <a:t>🏷️  Barcode Generation &amp; Scan Engine</a:t>
+              <a:t>🏷️  Barcode Scan Engine</a:t>
             </a:r>
           </a:p>
           <a:p>
             <a:pPr>
               <a:spcBef>
-                <a:spcPts val="800"/>
+                <a:spcPts val="300"/>
               </a:spcBef>
-              <a:defRPr sz="1200">
+              <a:defRPr sz="1050">
                 <a:solidFill>
                   <a:srgbClr val="CBD5E1"/>
                 </a:solidFill>
@@ -4124,7 +4148,7 @@
               </a:defRPr>
             </a:pPr>
             <a:r>
-              <a:t>Automatically generate standard EAN-13 barcodes and QR codes. Print full A4 barcode sticker sheets in one click.</a:t>
+              <a:t>Auto-generate EAN-13 barcodes &amp; QR codes. Print full A4 barcode sticker sheets in 1 click.</a:t>
             </a:r>
           </a:p>
         </p:txBody>
@@ -4137,8 +4161,8 @@
         </p:nvSpPr>
         <p:spPr>
           <a:xfrm>
-            <a:off x="731520" y="4297680"/>
-            <a:ext cx="5120640" cy="2011680"/>
+            <a:off x="731520" y="4206240"/>
+            <a:ext cx="2926080" cy="2194560"/>
           </a:xfrm>
           <a:prstGeom prst="roundRect">
             <a:avLst/>
@@ -4167,11 +4191,11 @@
           </a:fontRef>
         </p:style>
         <p:txBody>
-          <a:bodyPr rtlCol="0" anchor="ctr" wrap="square" lIns="274320" rIns="274320" tIns="228600" bIns="228600"/>
+          <a:bodyPr rtlCol="0" anchor="ctr" wrap="square" lIns="182880" rIns="182880" tIns="137160" bIns="137160"/>
           <a:lstStyle/>
           <a:p>
             <a:pPr algn="ctr">
-              <a:defRPr sz="1600" b="1">
+              <a:defRPr sz="1300" b="1">
                 <a:solidFill>
                   <a:srgbClr val="FFFFFF"/>
                 </a:solidFill>
@@ -4179,15 +4203,15 @@
               </a:defRPr>
             </a:pPr>
             <a:r>
-              <a:t>💳  Digital Ledger &amp; WhatsApp Reminders</a:t>
+              <a:t>💳  Digital Ledger Khata</a:t>
             </a:r>
           </a:p>
           <a:p>
             <a:pPr>
               <a:spcBef>
-                <a:spcPts val="800"/>
+                <a:spcPts val="300"/>
               </a:spcBef>
-              <a:defRPr sz="1200">
+              <a:defRPr sz="1050">
                 <a:solidFill>
                   <a:srgbClr val="CBD5E1"/>
                 </a:solidFill>
@@ -4195,7 +4219,7 @@
               </a:defRPr>
             </a:pPr>
             <a:r>
-              <a:t>Track real-time customer balances. Send automated WhatsApp payment reminders with direct online payment links.</a:t>
+              <a:t>Real-time party balances with automated WhatsApp payment links and instant settlement.</a:t>
             </a:r>
           </a:p>
         </p:txBody>
@@ -4208,8 +4232,8 @@
         </p:nvSpPr>
         <p:spPr>
           <a:xfrm>
-            <a:off x="6217920" y="4297680"/>
-            <a:ext cx="5120640" cy="2011680"/>
+            <a:off x="3840480" y="4206240"/>
+            <a:ext cx="2926080" cy="2194560"/>
           </a:xfrm>
           <a:prstGeom prst="roundRect">
             <a:avLst/>
@@ -4238,11 +4262,11 @@
           </a:fontRef>
         </p:style>
         <p:txBody>
-          <a:bodyPr rtlCol="0" anchor="ctr" wrap="square" lIns="274320" rIns="274320" tIns="228600" bIns="228600"/>
+          <a:bodyPr rtlCol="0" anchor="ctr" wrap="square" lIns="182880" rIns="182880" tIns="137160" bIns="137160"/>
           <a:lstStyle/>
           <a:p>
             <a:pPr algn="ctr">
-              <a:defRPr sz="1600" b="1">
+              <a:defRPr sz="1300" b="1">
                 <a:solidFill>
                   <a:srgbClr val="FFFFFF"/>
                 </a:solidFill>
@@ -4250,15 +4274,15 @@
               </a:defRPr>
             </a:pPr>
             <a:r>
-              <a:t>👥  Multi-Role Counter Interfaces</a:t>
+              <a:t>👥  Multi-Role Portals</a:t>
             </a:r>
           </a:p>
           <a:p>
             <a:pPr>
               <a:spcBef>
-                <a:spcPts val="800"/>
+                <a:spcPts val="300"/>
               </a:spcBef>
-              <a:defRPr sz="1200">
+              <a:defRPr sz="1050">
                 <a:solidFill>
                   <a:srgbClr val="CBD5E1"/>
                 </a:solidFill>
@@ -4266,11 +4290,35 @@
               </a:defRPr>
             </a:pPr>
             <a:r>
-              <a:t>Clean, dedicated portals for Store Owners, Cashier POS counters, Delivery Partners, and Accountants.</a:t>
-            </a:r>
-          </a:p>
-        </p:txBody>
-      </p:sp>
+              <a:t>Tailored views for Store Owners, Cashier POS counters, Delivery Partners, and Accountants.</a:t>
+            </a:r>
+          </a:p>
+        </p:txBody>
+      </p:sp>
+      <p:pic>
+        <p:nvPicPr>
+          <p:cNvPr id="10" name="Picture 9" descr="dashboard.png"/>
+          <p:cNvPicPr>
+            <a:picLocks noChangeAspect="1"/>
+          </p:cNvPicPr>
+          <p:nvPr/>
+        </p:nvPicPr>
+        <p:blipFill>
+          <a:blip r:embed="rId2"/>
+          <a:stretch>
+            <a:fillRect/>
+          </a:stretch>
+        </p:blipFill>
+        <p:spPr>
+          <a:xfrm>
+            <a:off x="7040880" y="1828800"/>
+            <a:ext cx="4389120" cy="2084832"/>
+          </a:xfrm>
+          <a:prstGeom prst="rect">
+            <a:avLst/>
+          </a:prstGeom>
+        </p:spPr>
+      </p:pic>
     </p:spTree>
   </p:cSld>
   <p:clrMapOvr>
@@ -4341,7 +4389,7 @@
         <p:spPr>
           <a:xfrm>
             <a:off x="731520" y="365760"/>
-            <a:ext cx="4114800" cy="365760"/>
+            <a:ext cx="5486400" cy="320040"/>
           </a:xfrm>
           <a:prstGeom prst="rect">
             <a:avLst/>
@@ -4376,8 +4424,8 @@
         </p:nvSpPr>
         <p:spPr>
           <a:xfrm>
-            <a:off x="731520" y="685800"/>
-            <a:ext cx="10515600" cy="731520"/>
+            <a:off x="731520" y="658368"/>
+            <a:ext cx="10515600" cy="640080"/>
           </a:xfrm>
           <a:prstGeom prst="rect">
             <a:avLst/>
@@ -4391,7 +4439,7 @@
           <a:lstStyle/>
           <a:p>
             <a:pPr>
-              <a:defRPr sz="2800" b="1">
+              <a:defRPr sz="2600" b="1">
                 <a:solidFill>
                   <a:srgbClr val="FFFFFF"/>
                 </a:solidFill>
@@ -4412,8 +4460,8 @@
         </p:nvSpPr>
         <p:spPr>
           <a:xfrm>
-            <a:off x="731520" y="1325880"/>
-            <a:ext cx="10515600" cy="457200"/>
+            <a:off x="731520" y="1261872"/>
+            <a:ext cx="10515600" cy="411480"/>
           </a:xfrm>
           <a:prstGeom prst="rect">
             <a:avLst/>
@@ -4427,7 +4475,7 @@
           <a:lstStyle/>
           <a:p>
             <a:pPr>
-              <a:defRPr sz="1300">
+              <a:defRPr sz="1200">
                 <a:solidFill>
                   <a:srgbClr val="94A3B8"/>
                 </a:solidFill>
@@ -4448,8 +4496,8 @@
         </p:nvSpPr>
         <p:spPr>
           <a:xfrm>
-            <a:off x="731520" y="2011680"/>
-            <a:ext cx="5120640" cy="2011680"/>
+            <a:off x="731520" y="1828800"/>
+            <a:ext cx="2926080" cy="2194560"/>
           </a:xfrm>
           <a:prstGeom prst="roundRect">
             <a:avLst/>
@@ -4478,11 +4526,11 @@
           </a:fontRef>
         </p:style>
         <p:txBody>
-          <a:bodyPr rtlCol="0" anchor="ctr" wrap="square" lIns="274320" rIns="274320" tIns="228600" bIns="228600"/>
+          <a:bodyPr rtlCol="0" anchor="ctr" wrap="square" lIns="182880" rIns="182880" tIns="137160" bIns="137160"/>
           <a:lstStyle/>
           <a:p>
             <a:pPr algn="ctr">
-              <a:defRPr sz="1600" b="1">
+              <a:defRPr sz="1300" b="1">
                 <a:solidFill>
                   <a:srgbClr val="FFFFFF"/>
                 </a:solidFill>
@@ -4490,15 +4538,15 @@
               </a:defRPr>
             </a:pPr>
             <a:r>
-              <a:t>🧾  Sales &amp; Invoicing Module</a:t>
+              <a:t>🧾  Sales &amp; Invoicing</a:t>
             </a:r>
           </a:p>
           <a:p>
             <a:pPr>
               <a:spcBef>
-                <a:spcPts val="800"/>
+                <a:spcPts val="300"/>
               </a:spcBef>
-              <a:defRPr sz="1200">
+              <a:defRPr sz="1050">
                 <a:solidFill>
                   <a:srgbClr val="CBD5E1"/>
                 </a:solidFill>
@@ -4506,7 +4554,7 @@
               </a:defRPr>
             </a:pPr>
             <a:r>
-              <a:t>Create customized invoices with dynamic discounts, multi-tax GST slabs, and instant PDF downloads with one click.</a:t>
+              <a:t>Fast billing counter with barcode scanner support, line discounts, and PDF downloads.</a:t>
             </a:r>
           </a:p>
         </p:txBody>
@@ -4519,8 +4567,8 @@
         </p:nvSpPr>
         <p:spPr>
           <a:xfrm>
-            <a:off x="6217920" y="2011680"/>
-            <a:ext cx="5120640" cy="2011680"/>
+            <a:off x="3840480" y="1828800"/>
+            <a:ext cx="2926080" cy="2194560"/>
           </a:xfrm>
           <a:prstGeom prst="roundRect">
             <a:avLst/>
@@ -4549,11 +4597,11 @@
           </a:fontRef>
         </p:style>
         <p:txBody>
-          <a:bodyPr rtlCol="0" anchor="ctr" wrap="square" lIns="274320" rIns="274320" tIns="228600" bIns="228600"/>
+          <a:bodyPr rtlCol="0" anchor="ctr" wrap="square" lIns="182880" rIns="182880" tIns="137160" bIns="137160"/>
           <a:lstStyle/>
           <a:p>
             <a:pPr algn="ctr">
-              <a:defRPr sz="1600" b="1">
+              <a:defRPr sz="1300" b="1">
                 <a:solidFill>
                   <a:srgbClr val="FFFFFF"/>
                 </a:solidFill>
@@ -4561,15 +4609,15 @@
               </a:defRPr>
             </a:pPr>
             <a:r>
-              <a:t>🛒  Purchase &amp; Vendor Tracking</a:t>
+              <a:t>🛒  Purchase &amp; Suppliers</a:t>
             </a:r>
           </a:p>
           <a:p>
             <a:pPr>
               <a:spcBef>
-                <a:spcPts val="800"/>
+                <a:spcPts val="300"/>
               </a:spcBef>
-              <a:defRPr sz="1200">
+              <a:defRPr sz="1050">
                 <a:solidFill>
                   <a:srgbClr val="CBD5E1"/>
                 </a:solidFill>
@@ -4577,7 +4625,7 @@
               </a:defRPr>
             </a:pPr>
             <a:r>
-              <a:t>Record supplier stock-in orders, manage accounts payable, and track supplier payment histories with zero errors.</a:t>
+              <a:t>Track vendor stock-in shipments, payment terms, and accounts payable automatically.</a:t>
             </a:r>
           </a:p>
         </p:txBody>
@@ -4590,8 +4638,8 @@
         </p:nvSpPr>
         <p:spPr>
           <a:xfrm>
-            <a:off x="731520" y="4297680"/>
-            <a:ext cx="5120640" cy="2011680"/>
+            <a:off x="731520" y="4206240"/>
+            <a:ext cx="2926080" cy="2194560"/>
           </a:xfrm>
           <a:prstGeom prst="roundRect">
             <a:avLst/>
@@ -4620,11 +4668,11 @@
           </a:fontRef>
         </p:style>
         <p:txBody>
-          <a:bodyPr rtlCol="0" anchor="ctr" wrap="square" lIns="274320" rIns="274320" tIns="228600" bIns="228600"/>
+          <a:bodyPr rtlCol="0" anchor="ctr" wrap="square" lIns="182880" rIns="182880" tIns="137160" bIns="137160"/>
           <a:lstStyle/>
           <a:p>
             <a:pPr algn="ctr">
-              <a:defRPr sz="1600" b="1">
+              <a:defRPr sz="1300" b="1">
                 <a:solidFill>
                   <a:srgbClr val="FFFFFF"/>
                 </a:solidFill>
@@ -4632,15 +4680,15 @@
               </a:defRPr>
             </a:pPr>
             <a:r>
-              <a:t>💰  Expense &amp; Cash Flow Ledger</a:t>
+              <a:t>💰  Expense Ledger</a:t>
             </a:r>
           </a:p>
           <a:p>
             <a:pPr>
               <a:spcBef>
-                <a:spcPts val="800"/>
+                <a:spcPts val="300"/>
               </a:spcBef>
-              <a:defRPr sz="1200">
+              <a:defRPr sz="1050">
                 <a:solidFill>
                   <a:srgbClr val="CBD5E1"/>
                 </a:solidFill>
@@ -4648,7 +4696,7 @@
               </a:defRPr>
             </a:pPr>
             <a:r>
-              <a:t>Categorize daily shop expenses (rent, salaries, utilities) to get an accurate daily net profit and cash-in-hand calculation.</a:t>
+              <a:t>Track daily operational expenses (rent, salaries, utilities) for true net profit tracking.</a:t>
             </a:r>
           </a:p>
         </p:txBody>
@@ -4661,8 +4709,8 @@
         </p:nvSpPr>
         <p:spPr>
           <a:xfrm>
-            <a:off x="6217920" y="4297680"/>
-            <a:ext cx="5120640" cy="2011680"/>
+            <a:off x="3840480" y="4206240"/>
+            <a:ext cx="2926080" cy="2194560"/>
           </a:xfrm>
           <a:prstGeom prst="roundRect">
             <a:avLst/>
@@ -4691,11 +4739,11 @@
           </a:fontRef>
         </p:style>
         <p:txBody>
-          <a:bodyPr rtlCol="0" anchor="ctr" wrap="square" lIns="274320" rIns="274320" tIns="228600" bIns="228600"/>
+          <a:bodyPr rtlCol="0" anchor="ctr" wrap="square" lIns="182880" rIns="182880" tIns="137160" bIns="137160"/>
           <a:lstStyle/>
           <a:p>
             <a:pPr algn="ctr">
-              <a:defRPr sz="1600" b="1">
+              <a:defRPr sz="1300" b="1">
                 <a:solidFill>
                   <a:srgbClr val="FFFFFF"/>
                 </a:solidFill>
@@ -4703,15 +4751,15 @@
               </a:defRPr>
             </a:pPr>
             <a:r>
-              <a:t>🤝  Parties &amp; Khata Management</a:t>
+              <a:t>🤝  Parties &amp; Khata CRM</a:t>
             </a:r>
           </a:p>
           <a:p>
             <a:pPr>
               <a:spcBef>
-                <a:spcPts val="800"/>
+                <a:spcPts val="300"/>
               </a:spcBef>
-              <a:defRPr sz="1200">
+              <a:defRPr sz="1050">
                 <a:solidFill>
                   <a:srgbClr val="CBD5E1"/>
                 </a:solidFill>
@@ -4719,11 +4767,35 @@
               </a:defRPr>
             </a:pPr>
             <a:r>
-              <a:t>Complete 360-degree CRM with detailed credit ledgers, contact directories, and automated settlement tracking.</a:t>
-            </a:r>
-          </a:p>
-        </p:txBody>
-      </p:sp>
+              <a:t>Complete directory with credit limits, transaction histories, and digital ledger statements.</a:t>
+            </a:r>
+          </a:p>
+        </p:txBody>
+      </p:sp>
+      <p:pic>
+        <p:nvPicPr>
+          <p:cNvPr id="10" name="Picture 9" descr="invoices.png"/>
+          <p:cNvPicPr>
+            <a:picLocks noChangeAspect="1"/>
+          </p:cNvPicPr>
+          <p:nvPr/>
+        </p:nvPicPr>
+        <p:blipFill>
+          <a:blip r:embed="rId2"/>
+          <a:stretch>
+            <a:fillRect/>
+          </a:stretch>
+        </p:blipFill>
+        <p:spPr>
+          <a:xfrm>
+            <a:off x="7040880" y="1828800"/>
+            <a:ext cx="4389120" cy="2084832"/>
+          </a:xfrm>
+          <a:prstGeom prst="rect">
+            <a:avLst/>
+          </a:prstGeom>
+        </p:spPr>
+      </p:pic>
     </p:spTree>
   </p:cSld>
   <p:clrMapOvr>
@@ -4794,7 +4866,7 @@
         <p:spPr>
           <a:xfrm>
             <a:off x="731520" y="365760"/>
-            <a:ext cx="4114800" cy="365760"/>
+            <a:ext cx="5486400" cy="320040"/>
           </a:xfrm>
           <a:prstGeom prst="rect">
             <a:avLst/>
@@ -4829,8 +4901,8 @@
         </p:nvSpPr>
         <p:spPr>
           <a:xfrm>
-            <a:off x="731520" y="685800"/>
-            <a:ext cx="10515600" cy="731520"/>
+            <a:off x="731520" y="658368"/>
+            <a:ext cx="10515600" cy="640080"/>
           </a:xfrm>
           <a:prstGeom prst="rect">
             <a:avLst/>
@@ -4844,7 +4916,7 @@
           <a:lstStyle/>
           <a:p>
             <a:pPr>
-              <a:defRPr sz="2800" b="1">
+              <a:defRPr sz="2600" b="1">
                 <a:solidFill>
                   <a:srgbClr val="FFFFFF"/>
                 </a:solidFill>
@@ -4865,8 +4937,8 @@
         </p:nvSpPr>
         <p:spPr>
           <a:xfrm>
-            <a:off x="731520" y="1325880"/>
-            <a:ext cx="10515600" cy="457200"/>
+            <a:off x="731520" y="1261872"/>
+            <a:ext cx="10515600" cy="411480"/>
           </a:xfrm>
           <a:prstGeom prst="rect">
             <a:avLst/>
@@ -4880,7 +4952,7 @@
           <a:lstStyle/>
           <a:p>
             <a:pPr>
-              <a:defRPr sz="1300">
+              <a:defRPr sz="1200">
                 <a:solidFill>
                   <a:srgbClr val="94A3B8"/>
                 </a:solidFill>
@@ -4901,8 +4973,8 @@
         </p:nvSpPr>
         <p:spPr>
           <a:xfrm>
-            <a:off x="731520" y="2011680"/>
-            <a:ext cx="5486400" cy="1280160"/>
+            <a:off x="731520" y="1828800"/>
+            <a:ext cx="5852160" cy="1371600"/>
           </a:xfrm>
           <a:prstGeom prst="roundRect">
             <a:avLst/>
@@ -4931,11 +5003,11 @@
           </a:fontRef>
         </p:style>
         <p:txBody>
-          <a:bodyPr rtlCol="0" anchor="ctr" wrap="square" lIns="274320" rIns="274320" tIns="228600" bIns="228600"/>
+          <a:bodyPr rtlCol="0" anchor="ctr" wrap="square" lIns="182880" rIns="182880" tIns="137160" bIns="137160"/>
           <a:lstStyle/>
           <a:p>
             <a:pPr algn="ctr">
-              <a:defRPr sz="1600" b="1">
+              <a:defRPr sz="1300" b="1">
                 <a:solidFill>
                   <a:srgbClr val="FFFFFF"/>
                 </a:solidFill>
@@ -4949,9 +5021,9 @@
           <a:p>
             <a:pPr>
               <a:spcBef>
-                <a:spcPts val="800"/>
+                <a:spcPts val="300"/>
               </a:spcBef>
-              <a:defRPr sz="1200">
+              <a:defRPr sz="1050">
                 <a:solidFill>
                   <a:srgbClr val="CBD5E1"/>
                 </a:solidFill>
@@ -4972,8 +5044,8 @@
         </p:nvSpPr>
         <p:spPr>
           <a:xfrm>
-            <a:off x="731520" y="3474720"/>
-            <a:ext cx="5486400" cy="1280160"/>
+            <a:off x="731520" y="3383280"/>
+            <a:ext cx="5852160" cy="1371600"/>
           </a:xfrm>
           <a:prstGeom prst="roundRect">
             <a:avLst/>
@@ -5002,11 +5074,11 @@
           </a:fontRef>
         </p:style>
         <p:txBody>
-          <a:bodyPr rtlCol="0" anchor="ctr" wrap="square" lIns="274320" rIns="274320" tIns="228600" bIns="228600"/>
+          <a:bodyPr rtlCol="0" anchor="ctr" wrap="square" lIns="182880" rIns="182880" tIns="137160" bIns="137160"/>
           <a:lstStyle/>
           <a:p>
             <a:pPr algn="ctr">
-              <a:defRPr sz="1600" b="1">
+              <a:defRPr sz="1300" b="1">
                 <a:solidFill>
                   <a:srgbClr val="FFFFFF"/>
                 </a:solidFill>
@@ -5014,15 +5086,15 @@
               </a:defRPr>
             </a:pPr>
             <a:r>
-              <a:t>🗺️  Live GPS Telematics &amp; Leaflet Map</a:t>
+              <a:t>🗺️  Live GPS Telematics &amp; Interactive Map</a:t>
             </a:r>
           </a:p>
           <a:p>
             <a:pPr>
               <a:spcBef>
-                <a:spcPts val="800"/>
+                <a:spcPts val="300"/>
               </a:spcBef>
-              <a:defRPr sz="1200">
+              <a:defRPr sz="1050">
                 <a:solidFill>
                   <a:srgbClr val="CBD5E1"/>
                 </a:solidFill>
@@ -5030,7 +5102,7 @@
               </a:defRPr>
             </a:pPr>
             <a:r>
-              <a:t>Live moving driver marker displaying actual route geometry, speed, and real-time vehicle coordinates.</a:t>
+              <a:t>Live moving driver marker powered by Leaflet, displaying actual route geometry and coordinates.</a:t>
             </a:r>
           </a:p>
         </p:txBody>
@@ -5044,7 +5116,7 @@
         <p:spPr>
           <a:xfrm>
             <a:off x="731520" y="4937760"/>
-            <a:ext cx="5486400" cy="1280160"/>
+            <a:ext cx="5852160" cy="1371600"/>
           </a:xfrm>
           <a:prstGeom prst="roundRect">
             <a:avLst/>
@@ -5073,11 +5145,11 @@
           </a:fontRef>
         </p:style>
         <p:txBody>
-          <a:bodyPr rtlCol="0" anchor="ctr" wrap="square" lIns="274320" rIns="274320" tIns="228600" bIns="228600"/>
+          <a:bodyPr rtlCol="0" anchor="ctr" wrap="square" lIns="182880" rIns="182880" tIns="137160" bIns="137160"/>
           <a:lstStyle/>
           <a:p>
             <a:pPr algn="ctr">
-              <a:defRPr sz="1600" b="1">
+              <a:defRPr sz="1300" b="1">
                 <a:solidFill>
                   <a:srgbClr val="FFFFFF"/>
                 </a:solidFill>
@@ -5091,9 +5163,9 @@
           <a:p>
             <a:pPr>
               <a:spcBef>
-                <a:spcPts val="800"/>
+                <a:spcPts val="300"/>
               </a:spcBef>
-              <a:defRPr sz="1200">
+              <a:defRPr sz="1050">
                 <a:solidFill>
                   <a:srgbClr val="CBD5E1"/>
                 </a:solidFill>
@@ -5122,8 +5194,8 @@
         </p:blipFill>
         <p:spPr>
           <a:xfrm>
-            <a:off x="6583680" y="2011680"/>
-            <a:ext cx="4846320" cy="2302002"/>
+            <a:off x="6858000" y="1828800"/>
+            <a:ext cx="4572000" cy="2171700"/>
           </a:xfrm>
           <a:prstGeom prst="rect">
             <a:avLst/>
@@ -5200,7 +5272,7 @@
         <p:spPr>
           <a:xfrm>
             <a:off x="731520" y="365760"/>
-            <a:ext cx="4114800" cy="365760"/>
+            <a:ext cx="5486400" cy="320040"/>
           </a:xfrm>
           <a:prstGeom prst="rect">
             <a:avLst/>
@@ -5235,8 +5307,8 @@
         </p:nvSpPr>
         <p:spPr>
           <a:xfrm>
-            <a:off x="731520" y="685800"/>
-            <a:ext cx="10515600" cy="731520"/>
+            <a:off x="731520" y="658368"/>
+            <a:ext cx="10515600" cy="640080"/>
           </a:xfrm>
           <a:prstGeom prst="rect">
             <a:avLst/>
@@ -5250,7 +5322,7 @@
           <a:lstStyle/>
           <a:p>
             <a:pPr>
-              <a:defRPr sz="2800" b="1">
+              <a:defRPr sz="2600" b="1">
                 <a:solidFill>
                   <a:srgbClr val="FFFFFF"/>
                 </a:solidFill>
@@ -5271,8 +5343,8 @@
         </p:nvSpPr>
         <p:spPr>
           <a:xfrm>
-            <a:off x="731520" y="1325880"/>
-            <a:ext cx="10515600" cy="457200"/>
+            <a:off x="731520" y="1261872"/>
+            <a:ext cx="10515600" cy="411480"/>
           </a:xfrm>
           <a:prstGeom prst="rect">
             <a:avLst/>
@@ -5286,7 +5358,7 @@
           <a:lstStyle/>
           <a:p>
             <a:pPr>
-              <a:defRPr sz="1300">
+              <a:defRPr sz="1200">
                 <a:solidFill>
                   <a:srgbClr val="94A3B8"/>
                 </a:solidFill>
@@ -5307,8 +5379,8 @@
         </p:nvSpPr>
         <p:spPr>
           <a:xfrm>
-            <a:off x="731520" y="2011680"/>
-            <a:ext cx="5120640" cy="2011680"/>
+            <a:off x="731520" y="1828800"/>
+            <a:ext cx="2926080" cy="2194560"/>
           </a:xfrm>
           <a:prstGeom prst="roundRect">
             <a:avLst/>
@@ -5337,11 +5409,11 @@
           </a:fontRef>
         </p:style>
         <p:txBody>
-          <a:bodyPr rtlCol="0" anchor="ctr" wrap="square" lIns="274320" rIns="274320" tIns="228600" bIns="228600"/>
+          <a:bodyPr rtlCol="0" anchor="ctr" wrap="square" lIns="182880" rIns="182880" tIns="137160" bIns="137160"/>
           <a:lstStyle/>
           <a:p>
             <a:pPr algn="ctr">
-              <a:defRPr sz="1600" b="1">
+              <a:defRPr sz="1300" b="1">
                 <a:solidFill>
                   <a:srgbClr val="FFFFFF"/>
                 </a:solidFill>
@@ -5349,15 +5421,15 @@
               </a:defRPr>
             </a:pPr>
             <a:r>
-              <a:t>⚛️  Frontend: React 19 + Vite</a:t>
+              <a:t>⚛️  React 19 + Vite Frontend</a:t>
             </a:r>
           </a:p>
           <a:p>
             <a:pPr>
               <a:spcBef>
-                <a:spcPts val="800"/>
+                <a:spcPts val="300"/>
               </a:spcBef>
-              <a:defRPr sz="1200">
+              <a:defRPr sz="1050">
                 <a:solidFill>
                   <a:srgbClr val="CBD5E1"/>
                 </a:solidFill>
@@ -5365,7 +5437,7 @@
               </a:defRPr>
             </a:pPr>
             <a:r>
-              <a:t>Blazing-fast client bundle, instant route transitions, zero page reloads, and seamless responsiveness across laptops, tablets, and mobile.</a:t>
+              <a:t>Sub-second transitions, responsive UI on laptops, tablets, and phones.</a:t>
             </a:r>
           </a:p>
         </p:txBody>
@@ -5378,8 +5450,8 @@
         </p:nvSpPr>
         <p:spPr>
           <a:xfrm>
-            <a:off x="6217920" y="2011680"/>
-            <a:ext cx="5120640" cy="2011680"/>
+            <a:off x="3840480" y="1828800"/>
+            <a:ext cx="2926080" cy="2194560"/>
           </a:xfrm>
           <a:prstGeom prst="roundRect">
             <a:avLst/>
@@ -5408,11 +5480,11 @@
           </a:fontRef>
         </p:style>
         <p:txBody>
-          <a:bodyPr rtlCol="0" anchor="ctr" wrap="square" lIns="274320" rIns="274320" tIns="228600" bIns="228600"/>
+          <a:bodyPr rtlCol="0" anchor="ctr" wrap="square" lIns="182880" rIns="182880" tIns="137160" bIns="137160"/>
           <a:lstStyle/>
           <a:p>
             <a:pPr algn="ctr">
-              <a:defRPr sz="1600" b="1">
+              <a:defRPr sz="1300" b="1">
                 <a:solidFill>
                   <a:srgbClr val="FFFFFF"/>
                 </a:solidFill>
@@ -5420,15 +5492,15 @@
               </a:defRPr>
             </a:pPr>
             <a:r>
-              <a:t>🟢  Backend: Node.js &amp; Express</a:t>
+              <a:t>🟢  Node.js &amp; Express Backend</a:t>
             </a:r>
           </a:p>
           <a:p>
             <a:pPr>
               <a:spcBef>
-                <a:spcPts val="800"/>
+                <a:spcPts val="300"/>
               </a:spcBef>
-              <a:defRPr sz="1200">
+              <a:defRPr sz="1050">
                 <a:solidFill>
                   <a:srgbClr val="CBD5E1"/>
                 </a:solidFill>
@@ -5436,7 +5508,7 @@
               </a:defRPr>
             </a:pPr>
             <a:r>
-              <a:t>High-throughput RESTful architecture powering live GPS streams, PDF invoice generators (PDFKit), and barcode rendering.</a:t>
+              <a:t>High-throughput REST APIs powering live telematics and PDFKit rendering.</a:t>
             </a:r>
           </a:p>
         </p:txBody>
@@ -5449,8 +5521,8 @@
         </p:nvSpPr>
         <p:spPr>
           <a:xfrm>
-            <a:off x="731520" y="4297680"/>
-            <a:ext cx="5120640" cy="2011680"/>
+            <a:off x="731520" y="4206240"/>
+            <a:ext cx="2926080" cy="2194560"/>
           </a:xfrm>
           <a:prstGeom prst="roundRect">
             <a:avLst/>
@@ -5479,11 +5551,11 @@
           </a:fontRef>
         </p:style>
         <p:txBody>
-          <a:bodyPr rtlCol="0" anchor="ctr" wrap="square" lIns="274320" rIns="274320" tIns="228600" bIns="228600"/>
+          <a:bodyPr rtlCol="0" anchor="ctr" wrap="square" lIns="182880" rIns="182880" tIns="137160" bIns="137160"/>
           <a:lstStyle/>
           <a:p>
             <a:pPr algn="ctr">
-              <a:defRPr sz="1600" b="1">
+              <a:defRPr sz="1300" b="1">
                 <a:solidFill>
                   <a:srgbClr val="FFFFFF"/>
                 </a:solidFill>
@@ -5491,15 +5563,15 @@
               </a:defRPr>
             </a:pPr>
             <a:r>
-              <a:t>🍃  Database: MongoDB Atlas</a:t>
+              <a:t>🍃  MongoDB Atlas Cloud</a:t>
             </a:r>
           </a:p>
           <a:p>
             <a:pPr>
               <a:spcBef>
-                <a:spcPts val="800"/>
+                <a:spcPts val="300"/>
               </a:spcBef>
-              <a:defRPr sz="1200">
+              <a:defRPr sz="1050">
                 <a:solidFill>
                   <a:srgbClr val="CBD5E1"/>
                 </a:solidFill>
@@ -5507,7 +5579,7 @@
               </a:defRPr>
             </a:pPr>
             <a:r>
-              <a:t>Cloud-native NoSQL database handling dynamic catalog structures, nested ledger transactions, and geospatial delivery points.</a:t>
+              <a:t>Cloud NoSQL database handling dynamic catalogs and geospatial coordinates.</a:t>
             </a:r>
           </a:p>
         </p:txBody>
@@ -5520,8 +5592,8 @@
         </p:nvSpPr>
         <p:spPr>
           <a:xfrm>
-            <a:off x="6217920" y="4297680"/>
-            <a:ext cx="5120640" cy="2011680"/>
+            <a:off x="3840480" y="4206240"/>
+            <a:ext cx="2926080" cy="2194560"/>
           </a:xfrm>
           <a:prstGeom prst="roundRect">
             <a:avLst/>
@@ -5550,11 +5622,11 @@
           </a:fontRef>
         </p:style>
         <p:txBody>
-          <a:bodyPr rtlCol="0" anchor="ctr" wrap="square" lIns="274320" rIns="274320" tIns="228600" bIns="228600"/>
+          <a:bodyPr rtlCol="0" anchor="ctr" wrap="square" lIns="182880" rIns="182880" tIns="137160" bIns="137160"/>
           <a:lstStyle/>
           <a:p>
             <a:pPr algn="ctr">
-              <a:defRPr sz="1600" b="1">
+              <a:defRPr sz="1300" b="1">
                 <a:solidFill>
                   <a:srgbClr val="FFFFFF"/>
                 </a:solidFill>
@@ -5562,15 +5634,15 @@
               </a:defRPr>
             </a:pPr>
             <a:r>
-              <a:t>🔒  Enterprise Security &amp; Compliance</a:t>
+              <a:t>🔒  Enterprise Security</a:t>
             </a:r>
           </a:p>
           <a:p>
             <a:pPr>
               <a:spcBef>
-                <a:spcPts val="800"/>
+                <a:spcPts val="300"/>
               </a:spcBef>
-              <a:defRPr sz="1200">
+              <a:defRPr sz="1050">
                 <a:solidFill>
                   <a:srgbClr val="CBD5E1"/>
                 </a:solidFill>
@@ -5578,11 +5650,35 @@
               </a:defRPr>
             </a:pPr>
             <a:r>
-              <a:t>Strict JWT role-based access control (Admin, Driver, Cashier), encrypted credentials, and automated GSTR-1 audit exports.</a:t>
-            </a:r>
-          </a:p>
-        </p:txBody>
-      </p:sp>
+              <a:t>JWT role-based access control, encrypted sessions, and automated GSTR-1 exports.</a:t>
+            </a:r>
+          </a:p>
+        </p:txBody>
+      </p:sp>
+      <p:pic>
+        <p:nvPicPr>
+          <p:cNvPr id="10" name="Picture 9" descr="techstack.jpg"/>
+          <p:cNvPicPr>
+            <a:picLocks noChangeAspect="1"/>
+          </p:cNvPicPr>
+          <p:nvPr/>
+        </p:nvPicPr>
+        <p:blipFill>
+          <a:blip r:embed="rId2"/>
+          <a:stretch>
+            <a:fillRect/>
+          </a:stretch>
+        </p:blipFill>
+        <p:spPr>
+          <a:xfrm>
+            <a:off x="7040880" y="1828800"/>
+            <a:ext cx="4389120" cy="2449741"/>
+          </a:xfrm>
+          <a:prstGeom prst="rect">
+            <a:avLst/>
+          </a:prstGeom>
+        </p:spPr>
+      </p:pic>
     </p:spTree>
   </p:cSld>
   <p:clrMapOvr>
@@ -5653,7 +5749,7 @@
         <p:spPr>
           <a:xfrm>
             <a:off x="731520" y="365760"/>
-            <a:ext cx="4114800" cy="365760"/>
+            <a:ext cx="5486400" cy="320040"/>
           </a:xfrm>
           <a:prstGeom prst="rect">
             <a:avLst/>
@@ -5688,8 +5784,8 @@
         </p:nvSpPr>
         <p:spPr>
           <a:xfrm>
-            <a:off x="731520" y="685800"/>
-            <a:ext cx="10515600" cy="731520"/>
+            <a:off x="731520" y="658368"/>
+            <a:ext cx="10515600" cy="640080"/>
           </a:xfrm>
           <a:prstGeom prst="rect">
             <a:avLst/>
@@ -5703,7 +5799,7 @@
           <a:lstStyle/>
           <a:p>
             <a:pPr>
-              <a:defRPr sz="2800" b="1">
+              <a:defRPr sz="2600" b="1">
                 <a:solidFill>
                   <a:srgbClr val="FFFFFF"/>
                 </a:solidFill>
@@ -5724,8 +5820,8 @@
         </p:nvSpPr>
         <p:spPr>
           <a:xfrm>
-            <a:off x="731520" y="1325880"/>
-            <a:ext cx="10515600" cy="457200"/>
+            <a:off x="731520" y="1261872"/>
+            <a:ext cx="10515600" cy="411480"/>
           </a:xfrm>
           <a:prstGeom prst="rect">
             <a:avLst/>
@@ -5739,7 +5835,7 @@
           <a:lstStyle/>
           <a:p>
             <a:pPr>
-              <a:defRPr sz="1300">
+              <a:defRPr sz="1200">
                 <a:solidFill>
                   <a:srgbClr val="94A3B8"/>
                 </a:solidFill>
@@ -5760,8 +5856,8 @@
         </p:nvSpPr>
         <p:spPr>
           <a:xfrm>
-            <a:off x="731520" y="2011680"/>
-            <a:ext cx="5120640" cy="2011680"/>
+            <a:off x="731520" y="1828800"/>
+            <a:ext cx="2926080" cy="2194560"/>
           </a:xfrm>
           <a:prstGeom prst="roundRect">
             <a:avLst/>
@@ -5790,11 +5886,11 @@
           </a:fontRef>
         </p:style>
         <p:txBody>
-          <a:bodyPr rtlCol="0" anchor="ctr" wrap="square" lIns="274320" rIns="274320" tIns="228600" bIns="228600"/>
+          <a:bodyPr rtlCol="0" anchor="ctr" wrap="square" lIns="182880" rIns="182880" tIns="137160" bIns="137160"/>
           <a:lstStyle/>
           <a:p>
             <a:pPr algn="ctr">
-              <a:defRPr sz="2400" b="1">
+              <a:defRPr sz="1800" b="1">
                 <a:solidFill>
                   <a:srgbClr val="10B981"/>
                 </a:solidFill>
@@ -5807,7 +5903,7 @@
           </a:p>
           <a:p>
             <a:pPr>
-              <a:defRPr sz="1600" b="1">
+              <a:defRPr sz="1300" b="1">
                 <a:solidFill>
                   <a:srgbClr val="FFFFFF"/>
                 </a:solidFill>
@@ -5821,9 +5917,9 @@
           <a:p>
             <a:pPr>
               <a:spcBef>
-                <a:spcPts val="800"/>
+                <a:spcPts val="300"/>
               </a:spcBef>
-              <a:defRPr sz="1200">
+              <a:defRPr sz="1050">
                 <a:solidFill>
                   <a:srgbClr val="CBD5E1"/>
                 </a:solidFill>
@@ -5831,7 +5927,7 @@
               </a:defRPr>
             </a:pPr>
             <a:r>
-              <a:t>Automated day-end book closing, tax calculation, and inventory reconciliation eliminate manual paperwork.</a:t>
+              <a:t>Automated day-end book closing and stock reconciliation eliminate manual paperwork.</a:t>
             </a:r>
           </a:p>
         </p:txBody>
@@ -5844,8 +5940,8 @@
         </p:nvSpPr>
         <p:spPr>
           <a:xfrm>
-            <a:off x="6217920" y="2011680"/>
-            <a:ext cx="5120640" cy="2011680"/>
+            <a:off x="3840480" y="1828800"/>
+            <a:ext cx="2926080" cy="2194560"/>
           </a:xfrm>
           <a:prstGeom prst="roundRect">
             <a:avLst/>
@@ -5874,11 +5970,11 @@
           </a:fontRef>
         </p:style>
         <p:txBody>
-          <a:bodyPr rtlCol="0" anchor="ctr" wrap="square" lIns="274320" rIns="274320" tIns="228600" bIns="228600"/>
+          <a:bodyPr rtlCol="0" anchor="ctr" wrap="square" lIns="182880" rIns="182880" tIns="137160" bIns="137160"/>
           <a:lstStyle/>
           <a:p>
             <a:pPr algn="ctr">
-              <a:defRPr sz="2400" b="1">
+              <a:defRPr sz="1800" b="1">
                 <a:solidFill>
                   <a:srgbClr val="6366F1"/>
                 </a:solidFill>
@@ -5891,7 +5987,7 @@
           </a:p>
           <a:p>
             <a:pPr>
-              <a:defRPr sz="1600" b="1">
+              <a:defRPr sz="1300" b="1">
                 <a:solidFill>
                   <a:srgbClr val="FFFFFF"/>
                 </a:solidFill>
@@ -5905,9 +6001,9 @@
           <a:p>
             <a:pPr>
               <a:spcBef>
-                <a:spcPts val="800"/>
+                <a:spcPts val="300"/>
               </a:spcBef>
-              <a:defRPr sz="1200">
+              <a:defRPr sz="1050">
                 <a:solidFill>
                   <a:srgbClr val="CBD5E1"/>
                 </a:solidFill>
@@ -5915,7 +6011,7 @@
               </a:defRPr>
             </a:pPr>
             <a:r>
-              <a:t>Automated WhatsApp payment links and instant online settlement reduce unpaid credit and overdue accounts.</a:t>
+              <a:t>Automated WhatsApp payment links and instant settlement recover credit 40% faster.</a:t>
             </a:r>
           </a:p>
         </p:txBody>
@@ -5928,8 +6024,8 @@
         </p:nvSpPr>
         <p:spPr>
           <a:xfrm>
-            <a:off x="731520" y="4297680"/>
-            <a:ext cx="5120640" cy="2011680"/>
+            <a:off x="731520" y="4206240"/>
+            <a:ext cx="2926080" cy="2194560"/>
           </a:xfrm>
           <a:prstGeom prst="roundRect">
             <a:avLst/>
@@ -5958,11 +6054,11 @@
           </a:fontRef>
         </p:style>
         <p:txBody>
-          <a:bodyPr rtlCol="0" anchor="ctr" wrap="square" lIns="274320" rIns="274320" tIns="228600" bIns="228600"/>
+          <a:bodyPr rtlCol="0" anchor="ctr" wrap="square" lIns="182880" rIns="182880" tIns="137160" bIns="137160"/>
           <a:lstStyle/>
           <a:p>
             <a:pPr algn="ctr">
-              <a:defRPr sz="2400" b="1">
+              <a:defRPr sz="1800" b="1">
                 <a:solidFill>
                   <a:srgbClr val="06B6D4"/>
                 </a:solidFill>
@@ -5975,7 +6071,7 @@
           </a:p>
           <a:p>
             <a:pPr>
-              <a:defRPr sz="1600" b="1">
+              <a:defRPr sz="1300" b="1">
                 <a:solidFill>
                   <a:srgbClr val="FFFFFF"/>
                 </a:solidFill>
@@ -5989,9 +6085,9 @@
           <a:p>
             <a:pPr>
               <a:spcBef>
-                <a:spcPts val="800"/>
+                <a:spcPts val="300"/>
               </a:spcBef>
-              <a:defRPr sz="1200">
+              <a:defRPr sz="1050">
                 <a:solidFill>
                   <a:srgbClr val="CBD5E1"/>
                 </a:solidFill>
@@ -5999,7 +6095,7 @@
               </a:defRPr>
             </a:pPr>
             <a:r>
-              <a:t>Customers track their own packages on live GPS maps, eliminating endless 'Where is my parcel?' inquiries.</a:t>
+              <a:t>Customers track their own packages on live GPS maps, eliminating endless inquiries.</a:t>
             </a:r>
           </a:p>
         </p:txBody>
@@ -6012,8 +6108,8 @@
         </p:nvSpPr>
         <p:spPr>
           <a:xfrm>
-            <a:off x="6217920" y="4297680"/>
-            <a:ext cx="5120640" cy="2011680"/>
+            <a:off x="3840480" y="4206240"/>
+            <a:ext cx="2926080" cy="2194560"/>
           </a:xfrm>
           <a:prstGeom prst="roundRect">
             <a:avLst/>
@@ -6042,11 +6138,11 @@
           </a:fontRef>
         </p:style>
         <p:txBody>
-          <a:bodyPr rtlCol="0" anchor="ctr" wrap="square" lIns="274320" rIns="274320" tIns="228600" bIns="228600"/>
+          <a:bodyPr rtlCol="0" anchor="ctr" wrap="square" lIns="182880" rIns="182880" tIns="137160" bIns="137160"/>
           <a:lstStyle/>
           <a:p>
             <a:pPr algn="ctr">
-              <a:defRPr sz="2400" b="1">
+              <a:defRPr sz="1800" b="1">
                 <a:solidFill>
                   <a:srgbClr val="8B5CF6"/>
                 </a:solidFill>
@@ -6059,7 +6155,7 @@
           </a:p>
           <a:p>
             <a:pPr>
-              <a:defRPr sz="1600" b="1">
+              <a:defRPr sz="1300" b="1">
                 <a:solidFill>
                   <a:srgbClr val="FFFFFF"/>
                 </a:solidFill>
@@ -6073,9 +6169,9 @@
           <a:p>
             <a:pPr>
               <a:spcBef>
-                <a:spcPts val="800"/>
+                <a:spcPts val="300"/>
               </a:spcBef>
-              <a:defRPr sz="1200">
+              <a:defRPr sz="1050">
                 <a:solidFill>
                   <a:srgbClr val="CBD5E1"/>
                 </a:solidFill>
@@ -6083,11 +6179,35 @@
               </a:defRPr>
             </a:pPr>
             <a:r>
-              <a:t>Single-click GSTR-1 summaries, P&amp;L reports, and catalog exports make tax filing completely painless.</a:t>
-            </a:r>
-          </a:p>
-        </p:txBody>
-      </p:sp>
+              <a:t>Single-click GSTR-1 summaries, P&amp;L reports, and catalog exports make filing simple.</a:t>
+            </a:r>
+          </a:p>
+        </p:txBody>
+      </p:sp>
+      <p:pic>
+        <p:nvPicPr>
+          <p:cNvPr id="10" name="Picture 9" descr="inventory.png"/>
+          <p:cNvPicPr>
+            <a:picLocks noChangeAspect="1"/>
+          </p:cNvPicPr>
+          <p:nvPr/>
+        </p:nvPicPr>
+        <p:blipFill>
+          <a:blip r:embed="rId2"/>
+          <a:stretch>
+            <a:fillRect/>
+          </a:stretch>
+        </p:blipFill>
+        <p:spPr>
+          <a:xfrm>
+            <a:off x="7040880" y="1828800"/>
+            <a:ext cx="4389120" cy="2084832"/>
+          </a:xfrm>
+          <a:prstGeom prst="rect">
+            <a:avLst/>
+          </a:prstGeom>
+        </p:spPr>
+      </p:pic>
     </p:spTree>
   </p:cSld>
   <p:clrMapOvr>
@@ -6157,8 +6277,8 @@
         </p:nvSpPr>
         <p:spPr>
           <a:xfrm>
-            <a:off x="1645920" y="1097280"/>
-            <a:ext cx="8869680" cy="4754880"/>
+            <a:off x="1097280" y="914400"/>
+            <a:ext cx="9966960" cy="5029200"/>
           </a:xfrm>
           <a:prstGeom prst="roundRect">
             <a:avLst/>
@@ -6199,7 +6319,7 @@
               </a:defRPr>
             </a:pPr>
             <a:r>
-              <a:t>✨ CONCLUSION &amp; DEMO ✨</a:t>
+              <a:t>✨ CONCLUSION &amp; Q&amp;A ✨</a:t>
             </a:r>
           </a:p>
           <a:p>
@@ -6251,13 +6371,13 @@
             </a:r>
             <a:br/>
             <a:r>
-              <a:t>01 - Pranali Bhagat  |  06 - Hrutuja Champanerkar  |  31 - Mayur Pandav  |  37 - Mol Patil</a:t>
+              <a:t>01 - Pranali Bhagat   |   06 - Hrutuja Champanerkar   |   31 - Mayur Pandav   |   37 - Mol Patil</a:t>
             </a:r>
           </a:p>
           <a:p>
             <a:pPr algn="ctr">
               <a:spcBef>
-                <a:spcPts val="1600"/>
+                <a:spcPts val="1800"/>
               </a:spcBef>
               <a:defRPr sz="1200">
                 <a:solidFill>

--- a/public/Vyapar_2.0_Presentation.pptx
+++ b/public/Vyapar_2.0_Presentation.pptx
@@ -3110,7 +3110,7 @@
             <a:avLst/>
           </a:prstGeom>
           <a:solidFill>
-            <a:srgbClr val="0A0F1D"/>
+            <a:srgbClr val="F8FAFC"/>
           </a:solidFill>
           <a:ln>
             <a:noFill/>
@@ -3163,7 +3163,7 @@
             <a:pPr>
               <a:defRPr sz="1100" b="1">
                 <a:solidFill>
-                  <a:srgbClr val="6366F1"/>
+                  <a:srgbClr val="4F46E5"/>
                 </a:solidFill>
                 <a:latin typeface="Arial"/>
               </a:defRPr>
@@ -3179,7 +3179,7 @@
               </a:spcBef>
               <a:defRPr sz="4400" b="1">
                 <a:solidFill>
-                  <a:srgbClr val="FFFFFF"/>
+                  <a:srgbClr val="0F172A"/>
                 </a:solidFill>
                 <a:latin typeface="Arial"/>
               </a:defRPr>
@@ -3195,7 +3195,7 @@
               </a:spcBef>
               <a:defRPr sz="1500">
                 <a:solidFill>
-                  <a:srgbClr val="CBD5E1"/>
+                  <a:srgbClr val="475569"/>
                 </a:solidFill>
                 <a:latin typeface="Arial"/>
               </a:defRPr>
@@ -3211,7 +3211,7 @@
               </a:spcBef>
               <a:defRPr sz="1100" b="1">
                 <a:solidFill>
-                  <a:srgbClr val="06B6D4"/>
+                  <a:srgbClr val="4F46E5"/>
                 </a:solidFill>
                 <a:latin typeface="Arial"/>
               </a:defRPr>
@@ -3237,11 +3237,11 @@
             <a:avLst/>
           </a:prstGeom>
           <a:solidFill>
-            <a:srgbClr val="131B2E"/>
+            <a:srgbClr val="FFFFFF"/>
           </a:solidFill>
           <a:ln w="19050">
             <a:solidFill>
-              <a:srgbClr val="6366F1"/>
+              <a:srgbClr val="4F46E5"/>
             </a:solidFill>
           </a:ln>
         </p:spPr>
@@ -3266,7 +3266,7 @@
             <a:pPr algn="ctr">
               <a:defRPr sz="1100" b="1">
                 <a:solidFill>
-                  <a:srgbClr val="6366F1"/>
+                  <a:srgbClr val="4F46E5"/>
                 </a:solidFill>
                 <a:latin typeface="Arial"/>
               </a:defRPr>
@@ -3282,7 +3282,7 @@
               </a:spcBef>
               <a:defRPr sz="1300" b="1">
                 <a:solidFill>
-                  <a:srgbClr val="FFFFFF"/>
+                  <a:srgbClr val="0F172A"/>
                 </a:solidFill>
                 <a:latin typeface="Arial"/>
               </a:defRPr>
@@ -3298,7 +3298,7 @@
               </a:spcBef>
               <a:defRPr sz="1300" b="1">
                 <a:solidFill>
-                  <a:srgbClr val="FFFFFF"/>
+                  <a:srgbClr val="0F172A"/>
                 </a:solidFill>
                 <a:latin typeface="Arial"/>
               </a:defRPr>
@@ -3314,7 +3314,7 @@
               </a:spcBef>
               <a:defRPr sz="1300" b="1">
                 <a:solidFill>
-                  <a:srgbClr val="FFFFFF"/>
+                  <a:srgbClr val="0F172A"/>
                 </a:solidFill>
                 <a:latin typeface="Arial"/>
               </a:defRPr>
@@ -3330,7 +3330,7 @@
               </a:spcBef>
               <a:defRPr sz="1300" b="1">
                 <a:solidFill>
-                  <a:srgbClr val="FFFFFF"/>
+                  <a:srgbClr val="0F172A"/>
                 </a:solidFill>
                 <a:latin typeface="Arial"/>
               </a:defRPr>
@@ -3398,7 +3398,7 @@
             <a:avLst/>
           </a:prstGeom>
           <a:solidFill>
-            <a:srgbClr val="0A0F1D"/>
+            <a:srgbClr val="F8FAFC"/>
           </a:solidFill>
           <a:ln>
             <a:noFill/>
@@ -3451,7 +3451,7 @@
             <a:pPr>
               <a:defRPr sz="1100" b="1">
                 <a:solidFill>
-                  <a:srgbClr val="EF4444"/>
+                  <a:srgbClr val="DC2626"/>
                 </a:solidFill>
                 <a:latin typeface="Arial"/>
               </a:defRPr>
@@ -3487,7 +3487,7 @@
             <a:pPr>
               <a:defRPr sz="2600" b="1">
                 <a:solidFill>
-                  <a:srgbClr val="FFFFFF"/>
+                  <a:srgbClr val="0F172A"/>
                 </a:solidFill>
                 <a:latin typeface="Arial"/>
               </a:defRPr>
@@ -3523,7 +3523,7 @@
             <a:pPr>
               <a:defRPr sz="1200">
                 <a:solidFill>
-                  <a:srgbClr val="94A3B8"/>
+                  <a:srgbClr val="64748B"/>
                 </a:solidFill>
                 <a:latin typeface="Arial"/>
               </a:defRPr>
@@ -3549,11 +3549,11 @@
             <a:avLst/>
           </a:prstGeom>
           <a:solidFill>
-            <a:srgbClr val="131B2E"/>
+            <a:srgbClr val="FFFFFF"/>
           </a:solidFill>
           <a:ln w="19050">
             <a:solidFill>
-              <a:srgbClr val="EF4444"/>
+              <a:srgbClr val="DC2626"/>
             </a:solidFill>
           </a:ln>
         </p:spPr>
@@ -3578,7 +3578,7 @@
             <a:pPr algn="ctr">
               <a:defRPr sz="1300" b="1">
                 <a:solidFill>
-                  <a:srgbClr val="FFFFFF"/>
+                  <a:srgbClr val="0F172A"/>
                 </a:solidFill>
                 <a:latin typeface="Arial"/>
               </a:defRPr>
@@ -3594,7 +3594,7 @@
               </a:spcBef>
               <a:defRPr sz="1050">
                 <a:solidFill>
-                  <a:srgbClr val="CBD5E1"/>
+                  <a:srgbClr val="475569"/>
                 </a:solidFill>
                 <a:latin typeface="Arial"/>
               </a:defRPr>
@@ -3620,11 +3620,11 @@
             <a:avLst/>
           </a:prstGeom>
           <a:solidFill>
-            <a:srgbClr val="131B2E"/>
+            <a:srgbClr val="FFFFFF"/>
           </a:solidFill>
           <a:ln w="19050">
             <a:solidFill>
-              <a:srgbClr val="EF4444"/>
+              <a:srgbClr val="DC2626"/>
             </a:solidFill>
           </a:ln>
         </p:spPr>
@@ -3649,7 +3649,7 @@
             <a:pPr algn="ctr">
               <a:defRPr sz="1300" b="1">
                 <a:solidFill>
-                  <a:srgbClr val="FFFFFF"/>
+                  <a:srgbClr val="0F172A"/>
                 </a:solidFill>
                 <a:latin typeface="Arial"/>
               </a:defRPr>
@@ -3665,7 +3665,7 @@
               </a:spcBef>
               <a:defRPr sz="1050">
                 <a:solidFill>
-                  <a:srgbClr val="CBD5E1"/>
+                  <a:srgbClr val="475569"/>
                 </a:solidFill>
                 <a:latin typeface="Arial"/>
               </a:defRPr>
@@ -3691,11 +3691,11 @@
             <a:avLst/>
           </a:prstGeom>
           <a:solidFill>
-            <a:srgbClr val="131B2E"/>
+            <a:srgbClr val="FFFFFF"/>
           </a:solidFill>
           <a:ln w="19050">
             <a:solidFill>
-              <a:srgbClr val="EF4444"/>
+              <a:srgbClr val="DC2626"/>
             </a:solidFill>
           </a:ln>
         </p:spPr>
@@ -3720,7 +3720,7 @@
             <a:pPr algn="ctr">
               <a:defRPr sz="1300" b="1">
                 <a:solidFill>
-                  <a:srgbClr val="FFFFFF"/>
+                  <a:srgbClr val="0F172A"/>
                 </a:solidFill>
                 <a:latin typeface="Arial"/>
               </a:defRPr>
@@ -3736,7 +3736,7 @@
               </a:spcBef>
               <a:defRPr sz="1050">
                 <a:solidFill>
-                  <a:srgbClr val="CBD5E1"/>
+                  <a:srgbClr val="475569"/>
                 </a:solidFill>
                 <a:latin typeface="Arial"/>
               </a:defRPr>
@@ -3762,11 +3762,11 @@
             <a:avLst/>
           </a:prstGeom>
           <a:solidFill>
-            <a:srgbClr val="131B2E"/>
+            <a:srgbClr val="FFFFFF"/>
           </a:solidFill>
           <a:ln w="19050">
             <a:solidFill>
-              <a:srgbClr val="EF4444"/>
+              <a:srgbClr val="DC2626"/>
             </a:solidFill>
           </a:ln>
         </p:spPr>
@@ -3791,7 +3791,7 @@
             <a:pPr algn="ctr">
               <a:defRPr sz="1300" b="1">
                 <a:solidFill>
-                  <a:srgbClr val="FFFFFF"/>
+                  <a:srgbClr val="0F172A"/>
                 </a:solidFill>
                 <a:latin typeface="Arial"/>
               </a:defRPr>
@@ -3807,7 +3807,7 @@
               </a:spcBef>
               <a:defRPr sz="1050">
                 <a:solidFill>
-                  <a:srgbClr val="CBD5E1"/>
+                  <a:srgbClr val="475569"/>
                 </a:solidFill>
                 <a:latin typeface="Arial"/>
               </a:defRPr>
@@ -3875,7 +3875,7 @@
             <a:avLst/>
           </a:prstGeom>
           <a:solidFill>
-            <a:srgbClr val="0A0F1D"/>
+            <a:srgbClr val="F8FAFC"/>
           </a:solidFill>
           <a:ln>
             <a:noFill/>
@@ -3928,7 +3928,7 @@
             <a:pPr>
               <a:defRPr sz="1100" b="1">
                 <a:solidFill>
-                  <a:srgbClr val="10B981"/>
+                  <a:srgbClr val="059669"/>
                 </a:solidFill>
                 <a:latin typeface="Arial"/>
               </a:defRPr>
@@ -3964,7 +3964,7 @@
             <a:pPr>
               <a:defRPr sz="2600" b="1">
                 <a:solidFill>
-                  <a:srgbClr val="FFFFFF"/>
+                  <a:srgbClr val="0F172A"/>
                 </a:solidFill>
                 <a:latin typeface="Arial"/>
               </a:defRPr>
@@ -4000,7 +4000,7 @@
             <a:pPr>
               <a:defRPr sz="1200">
                 <a:solidFill>
-                  <a:srgbClr val="94A3B8"/>
+                  <a:srgbClr val="64748B"/>
                 </a:solidFill>
                 <a:latin typeface="Arial"/>
               </a:defRPr>
@@ -4026,11 +4026,11 @@
             <a:avLst/>
           </a:prstGeom>
           <a:solidFill>
-            <a:srgbClr val="131B2E"/>
+            <a:srgbClr val="FFFFFF"/>
           </a:solidFill>
           <a:ln w="19050">
             <a:solidFill>
-              <a:srgbClr val="6366F1"/>
+              <a:srgbClr val="4F46E5"/>
             </a:solidFill>
           </a:ln>
         </p:spPr>
@@ -4055,7 +4055,7 @@
             <a:pPr algn="ctr">
               <a:defRPr sz="1300" b="1">
                 <a:solidFill>
-                  <a:srgbClr val="FFFFFF"/>
+                  <a:srgbClr val="0F172A"/>
                 </a:solidFill>
                 <a:latin typeface="Arial"/>
               </a:defRPr>
@@ -4071,7 +4071,7 @@
               </a:spcBef>
               <a:defRPr sz="1050">
                 <a:solidFill>
-                  <a:srgbClr val="CBD5E1"/>
+                  <a:srgbClr val="475569"/>
                 </a:solidFill>
                 <a:latin typeface="Arial"/>
               </a:defRPr>
@@ -4097,11 +4097,11 @@
             <a:avLst/>
           </a:prstGeom>
           <a:solidFill>
-            <a:srgbClr val="131B2E"/>
+            <a:srgbClr val="FFFFFF"/>
           </a:solidFill>
           <a:ln w="19050">
             <a:solidFill>
-              <a:srgbClr val="10B981"/>
+              <a:srgbClr val="059669"/>
             </a:solidFill>
           </a:ln>
         </p:spPr>
@@ -4126,7 +4126,7 @@
             <a:pPr algn="ctr">
               <a:defRPr sz="1300" b="1">
                 <a:solidFill>
-                  <a:srgbClr val="FFFFFF"/>
+                  <a:srgbClr val="0F172A"/>
                 </a:solidFill>
                 <a:latin typeface="Arial"/>
               </a:defRPr>
@@ -4142,7 +4142,7 @@
               </a:spcBef>
               <a:defRPr sz="1050">
                 <a:solidFill>
-                  <a:srgbClr val="CBD5E1"/>
+                  <a:srgbClr val="475569"/>
                 </a:solidFill>
                 <a:latin typeface="Arial"/>
               </a:defRPr>
@@ -4168,11 +4168,11 @@
             <a:avLst/>
           </a:prstGeom>
           <a:solidFill>
-            <a:srgbClr val="131B2E"/>
+            <a:srgbClr val="FFFFFF"/>
           </a:solidFill>
           <a:ln w="19050">
             <a:solidFill>
-              <a:srgbClr val="06B6D4"/>
+              <a:srgbClr val="0284C7"/>
             </a:solidFill>
           </a:ln>
         </p:spPr>
@@ -4197,7 +4197,7 @@
             <a:pPr algn="ctr">
               <a:defRPr sz="1300" b="1">
                 <a:solidFill>
-                  <a:srgbClr val="FFFFFF"/>
+                  <a:srgbClr val="0F172A"/>
                 </a:solidFill>
                 <a:latin typeface="Arial"/>
               </a:defRPr>
@@ -4213,7 +4213,7 @@
               </a:spcBef>
               <a:defRPr sz="1050">
                 <a:solidFill>
-                  <a:srgbClr val="CBD5E1"/>
+                  <a:srgbClr val="475569"/>
                 </a:solidFill>
                 <a:latin typeface="Arial"/>
               </a:defRPr>
@@ -4239,11 +4239,11 @@
             <a:avLst/>
           </a:prstGeom>
           <a:solidFill>
-            <a:srgbClr val="131B2E"/>
+            <a:srgbClr val="FFFFFF"/>
           </a:solidFill>
           <a:ln w="19050">
             <a:solidFill>
-              <a:srgbClr val="8B5CF6"/>
+              <a:srgbClr val="7C3AED"/>
             </a:solidFill>
           </a:ln>
         </p:spPr>
@@ -4268,7 +4268,7 @@
             <a:pPr algn="ctr">
               <a:defRPr sz="1300" b="1">
                 <a:solidFill>
-                  <a:srgbClr val="FFFFFF"/>
+                  <a:srgbClr val="0F172A"/>
                 </a:solidFill>
                 <a:latin typeface="Arial"/>
               </a:defRPr>
@@ -4284,7 +4284,7 @@
               </a:spcBef>
               <a:defRPr sz="1050">
                 <a:solidFill>
-                  <a:srgbClr val="CBD5E1"/>
+                  <a:srgbClr val="475569"/>
                 </a:solidFill>
                 <a:latin typeface="Arial"/>
               </a:defRPr>
@@ -4352,7 +4352,7 @@
             <a:avLst/>
           </a:prstGeom>
           <a:solidFill>
-            <a:srgbClr val="0A0F1D"/>
+            <a:srgbClr val="F8FAFC"/>
           </a:solidFill>
           <a:ln>
             <a:noFill/>
@@ -4405,7 +4405,7 @@
             <a:pPr>
               <a:defRPr sz="1100" b="1">
                 <a:solidFill>
-                  <a:srgbClr val="06B6D4"/>
+                  <a:srgbClr val="0284C7"/>
                 </a:solidFill>
                 <a:latin typeface="Arial"/>
               </a:defRPr>
@@ -4441,7 +4441,7 @@
             <a:pPr>
               <a:defRPr sz="2600" b="1">
                 <a:solidFill>
-                  <a:srgbClr val="FFFFFF"/>
+                  <a:srgbClr val="0F172A"/>
                 </a:solidFill>
                 <a:latin typeface="Arial"/>
               </a:defRPr>
@@ -4477,7 +4477,7 @@
             <a:pPr>
               <a:defRPr sz="1200">
                 <a:solidFill>
-                  <a:srgbClr val="94A3B8"/>
+                  <a:srgbClr val="64748B"/>
                 </a:solidFill>
                 <a:latin typeface="Arial"/>
               </a:defRPr>
@@ -4503,11 +4503,11 @@
             <a:avLst/>
           </a:prstGeom>
           <a:solidFill>
-            <a:srgbClr val="131B2E"/>
+            <a:srgbClr val="FFFFFF"/>
           </a:solidFill>
           <a:ln w="19050">
             <a:solidFill>
-              <a:srgbClr val="6366F1"/>
+              <a:srgbClr val="4F46E5"/>
             </a:solidFill>
           </a:ln>
         </p:spPr>
@@ -4532,7 +4532,7 @@
             <a:pPr algn="ctr">
               <a:defRPr sz="1300" b="1">
                 <a:solidFill>
-                  <a:srgbClr val="FFFFFF"/>
+                  <a:srgbClr val="0F172A"/>
                 </a:solidFill>
                 <a:latin typeface="Arial"/>
               </a:defRPr>
@@ -4548,7 +4548,7 @@
               </a:spcBef>
               <a:defRPr sz="1050">
                 <a:solidFill>
-                  <a:srgbClr val="CBD5E1"/>
+                  <a:srgbClr val="475569"/>
                 </a:solidFill>
                 <a:latin typeface="Arial"/>
               </a:defRPr>
@@ -4574,11 +4574,11 @@
             <a:avLst/>
           </a:prstGeom>
           <a:solidFill>
-            <a:srgbClr val="131B2E"/>
+            <a:srgbClr val="FFFFFF"/>
           </a:solidFill>
           <a:ln w="19050">
             <a:solidFill>
-              <a:srgbClr val="10B981"/>
+              <a:srgbClr val="059669"/>
             </a:solidFill>
           </a:ln>
         </p:spPr>
@@ -4603,7 +4603,7 @@
             <a:pPr algn="ctr">
               <a:defRPr sz="1300" b="1">
                 <a:solidFill>
-                  <a:srgbClr val="FFFFFF"/>
+                  <a:srgbClr val="0F172A"/>
                 </a:solidFill>
                 <a:latin typeface="Arial"/>
               </a:defRPr>
@@ -4619,7 +4619,7 @@
               </a:spcBef>
               <a:defRPr sz="1050">
                 <a:solidFill>
-                  <a:srgbClr val="CBD5E1"/>
+                  <a:srgbClr val="475569"/>
                 </a:solidFill>
                 <a:latin typeface="Arial"/>
               </a:defRPr>
@@ -4645,11 +4645,11 @@
             <a:avLst/>
           </a:prstGeom>
           <a:solidFill>
-            <a:srgbClr val="131B2E"/>
+            <a:srgbClr val="FFFFFF"/>
           </a:solidFill>
           <a:ln w="19050">
             <a:solidFill>
-              <a:srgbClr val="EF4444"/>
+              <a:srgbClr val="DC2626"/>
             </a:solidFill>
           </a:ln>
         </p:spPr>
@@ -4674,7 +4674,7 @@
             <a:pPr algn="ctr">
               <a:defRPr sz="1300" b="1">
                 <a:solidFill>
-                  <a:srgbClr val="FFFFFF"/>
+                  <a:srgbClr val="0F172A"/>
                 </a:solidFill>
                 <a:latin typeface="Arial"/>
               </a:defRPr>
@@ -4690,7 +4690,7 @@
               </a:spcBef>
               <a:defRPr sz="1050">
                 <a:solidFill>
-                  <a:srgbClr val="CBD5E1"/>
+                  <a:srgbClr val="475569"/>
                 </a:solidFill>
                 <a:latin typeface="Arial"/>
               </a:defRPr>
@@ -4716,11 +4716,11 @@
             <a:avLst/>
           </a:prstGeom>
           <a:solidFill>
-            <a:srgbClr val="131B2E"/>
+            <a:srgbClr val="FFFFFF"/>
           </a:solidFill>
           <a:ln w="19050">
             <a:solidFill>
-              <a:srgbClr val="06B6D4"/>
+              <a:srgbClr val="0284C7"/>
             </a:solidFill>
           </a:ln>
         </p:spPr>
@@ -4745,7 +4745,7 @@
             <a:pPr algn="ctr">
               <a:defRPr sz="1300" b="1">
                 <a:solidFill>
-                  <a:srgbClr val="FFFFFF"/>
+                  <a:srgbClr val="0F172A"/>
                 </a:solidFill>
                 <a:latin typeface="Arial"/>
               </a:defRPr>
@@ -4761,7 +4761,7 @@
               </a:spcBef>
               <a:defRPr sz="1050">
                 <a:solidFill>
-                  <a:srgbClr val="CBD5E1"/>
+                  <a:srgbClr val="475569"/>
                 </a:solidFill>
                 <a:latin typeface="Arial"/>
               </a:defRPr>
@@ -4829,7 +4829,7 @@
             <a:avLst/>
           </a:prstGeom>
           <a:solidFill>
-            <a:srgbClr val="0A0F1D"/>
+            <a:srgbClr val="F8FAFC"/>
           </a:solidFill>
           <a:ln>
             <a:noFill/>
@@ -4882,7 +4882,7 @@
             <a:pPr>
               <a:defRPr sz="1100" b="1">
                 <a:solidFill>
-                  <a:srgbClr val="06B6D4"/>
+                  <a:srgbClr val="0284C7"/>
                 </a:solidFill>
                 <a:latin typeface="Arial"/>
               </a:defRPr>
@@ -4918,7 +4918,7 @@
             <a:pPr>
               <a:defRPr sz="2600" b="1">
                 <a:solidFill>
-                  <a:srgbClr val="FFFFFF"/>
+                  <a:srgbClr val="0F172A"/>
                 </a:solidFill>
                 <a:latin typeface="Arial"/>
               </a:defRPr>
@@ -4954,7 +4954,7 @@
             <a:pPr>
               <a:defRPr sz="1200">
                 <a:solidFill>
-                  <a:srgbClr val="94A3B8"/>
+                  <a:srgbClr val="64748B"/>
                 </a:solidFill>
                 <a:latin typeface="Arial"/>
               </a:defRPr>
@@ -4980,11 +4980,11 @@
             <a:avLst/>
           </a:prstGeom>
           <a:solidFill>
-            <a:srgbClr val="131B2E"/>
+            <a:srgbClr val="FFFFFF"/>
           </a:solidFill>
           <a:ln w="19050">
             <a:solidFill>
-              <a:srgbClr val="06B6D4"/>
+              <a:srgbClr val="0284C7"/>
             </a:solidFill>
           </a:ln>
         </p:spPr>
@@ -5009,7 +5009,7 @@
             <a:pPr algn="ctr">
               <a:defRPr sz="1300" b="1">
                 <a:solidFill>
-                  <a:srgbClr val="FFFFFF"/>
+                  <a:srgbClr val="0F172A"/>
                 </a:solidFill>
                 <a:latin typeface="Arial"/>
               </a:defRPr>
@@ -5025,7 +5025,7 @@
               </a:spcBef>
               <a:defRPr sz="1050">
                 <a:solidFill>
-                  <a:srgbClr val="CBD5E1"/>
+                  <a:srgbClr val="475569"/>
                 </a:solidFill>
                 <a:latin typeface="Arial"/>
               </a:defRPr>
@@ -5051,11 +5051,11 @@
             <a:avLst/>
           </a:prstGeom>
           <a:solidFill>
-            <a:srgbClr val="131B2E"/>
+            <a:srgbClr val="FFFFFF"/>
           </a:solidFill>
           <a:ln w="19050">
             <a:solidFill>
-              <a:srgbClr val="6366F1"/>
+              <a:srgbClr val="4F46E5"/>
             </a:solidFill>
           </a:ln>
         </p:spPr>
@@ -5080,7 +5080,7 @@
             <a:pPr algn="ctr">
               <a:defRPr sz="1300" b="1">
                 <a:solidFill>
-                  <a:srgbClr val="FFFFFF"/>
+                  <a:srgbClr val="0F172A"/>
                 </a:solidFill>
                 <a:latin typeface="Arial"/>
               </a:defRPr>
@@ -5096,7 +5096,7 @@
               </a:spcBef>
               <a:defRPr sz="1050">
                 <a:solidFill>
-                  <a:srgbClr val="CBD5E1"/>
+                  <a:srgbClr val="475569"/>
                 </a:solidFill>
                 <a:latin typeface="Arial"/>
               </a:defRPr>
@@ -5122,11 +5122,11 @@
             <a:avLst/>
           </a:prstGeom>
           <a:solidFill>
-            <a:srgbClr val="131B2E"/>
+            <a:srgbClr val="FFFFFF"/>
           </a:solidFill>
           <a:ln w="19050">
             <a:solidFill>
-              <a:srgbClr val="10B981"/>
+              <a:srgbClr val="059669"/>
             </a:solidFill>
           </a:ln>
         </p:spPr>
@@ -5151,7 +5151,7 @@
             <a:pPr algn="ctr">
               <a:defRPr sz="1300" b="1">
                 <a:solidFill>
-                  <a:srgbClr val="FFFFFF"/>
+                  <a:srgbClr val="0F172A"/>
                 </a:solidFill>
                 <a:latin typeface="Arial"/>
               </a:defRPr>
@@ -5167,7 +5167,7 @@
               </a:spcBef>
               <a:defRPr sz="1050">
                 <a:solidFill>
-                  <a:srgbClr val="CBD5E1"/>
+                  <a:srgbClr val="475569"/>
                 </a:solidFill>
                 <a:latin typeface="Arial"/>
               </a:defRPr>
@@ -5235,7 +5235,7 @@
             <a:avLst/>
           </a:prstGeom>
           <a:solidFill>
-            <a:srgbClr val="0A0F1D"/>
+            <a:srgbClr val="F8FAFC"/>
           </a:solidFill>
           <a:ln>
             <a:noFill/>
@@ -5288,7 +5288,7 @@
             <a:pPr>
               <a:defRPr sz="1100" b="1">
                 <a:solidFill>
-                  <a:srgbClr val="8B5CF6"/>
+                  <a:srgbClr val="7C3AED"/>
                 </a:solidFill>
                 <a:latin typeface="Arial"/>
               </a:defRPr>
@@ -5324,7 +5324,7 @@
             <a:pPr>
               <a:defRPr sz="2600" b="1">
                 <a:solidFill>
-                  <a:srgbClr val="FFFFFF"/>
+                  <a:srgbClr val="0F172A"/>
                 </a:solidFill>
                 <a:latin typeface="Arial"/>
               </a:defRPr>
@@ -5360,7 +5360,7 @@
             <a:pPr>
               <a:defRPr sz="1200">
                 <a:solidFill>
-                  <a:srgbClr val="94A3B8"/>
+                  <a:srgbClr val="64748B"/>
                 </a:solidFill>
                 <a:latin typeface="Arial"/>
               </a:defRPr>
@@ -5386,11 +5386,11 @@
             <a:avLst/>
           </a:prstGeom>
           <a:solidFill>
-            <a:srgbClr val="131B2E"/>
+            <a:srgbClr val="FFFFFF"/>
           </a:solidFill>
           <a:ln w="19050">
             <a:solidFill>
-              <a:srgbClr val="6366F1"/>
+              <a:srgbClr val="4F46E5"/>
             </a:solidFill>
           </a:ln>
         </p:spPr>
@@ -5415,7 +5415,7 @@
             <a:pPr algn="ctr">
               <a:defRPr sz="1300" b="1">
                 <a:solidFill>
-                  <a:srgbClr val="FFFFFF"/>
+                  <a:srgbClr val="0F172A"/>
                 </a:solidFill>
                 <a:latin typeface="Arial"/>
               </a:defRPr>
@@ -5431,7 +5431,7 @@
               </a:spcBef>
               <a:defRPr sz="1050">
                 <a:solidFill>
-                  <a:srgbClr val="CBD5E1"/>
+                  <a:srgbClr val="475569"/>
                 </a:solidFill>
                 <a:latin typeface="Arial"/>
               </a:defRPr>
@@ -5457,11 +5457,11 @@
             <a:avLst/>
           </a:prstGeom>
           <a:solidFill>
-            <a:srgbClr val="131B2E"/>
+            <a:srgbClr val="FFFFFF"/>
           </a:solidFill>
           <a:ln w="19050">
             <a:solidFill>
-              <a:srgbClr val="10B981"/>
+              <a:srgbClr val="059669"/>
             </a:solidFill>
           </a:ln>
         </p:spPr>
@@ -5486,7 +5486,7 @@
             <a:pPr algn="ctr">
               <a:defRPr sz="1300" b="1">
                 <a:solidFill>
-                  <a:srgbClr val="FFFFFF"/>
+                  <a:srgbClr val="0F172A"/>
                 </a:solidFill>
                 <a:latin typeface="Arial"/>
               </a:defRPr>
@@ -5502,7 +5502,7 @@
               </a:spcBef>
               <a:defRPr sz="1050">
                 <a:solidFill>
-                  <a:srgbClr val="CBD5E1"/>
+                  <a:srgbClr val="475569"/>
                 </a:solidFill>
                 <a:latin typeface="Arial"/>
               </a:defRPr>
@@ -5528,11 +5528,11 @@
             <a:avLst/>
           </a:prstGeom>
           <a:solidFill>
-            <a:srgbClr val="131B2E"/>
+            <a:srgbClr val="FFFFFF"/>
           </a:solidFill>
           <a:ln w="19050">
             <a:solidFill>
-              <a:srgbClr val="06B6D4"/>
+              <a:srgbClr val="0284C7"/>
             </a:solidFill>
           </a:ln>
         </p:spPr>
@@ -5557,7 +5557,7 @@
             <a:pPr algn="ctr">
               <a:defRPr sz="1300" b="1">
                 <a:solidFill>
-                  <a:srgbClr val="FFFFFF"/>
+                  <a:srgbClr val="0F172A"/>
                 </a:solidFill>
                 <a:latin typeface="Arial"/>
               </a:defRPr>
@@ -5573,7 +5573,7 @@
               </a:spcBef>
               <a:defRPr sz="1050">
                 <a:solidFill>
-                  <a:srgbClr val="CBD5E1"/>
+                  <a:srgbClr val="475569"/>
                 </a:solidFill>
                 <a:latin typeface="Arial"/>
               </a:defRPr>
@@ -5599,11 +5599,11 @@
             <a:avLst/>
           </a:prstGeom>
           <a:solidFill>
-            <a:srgbClr val="131B2E"/>
+            <a:srgbClr val="FFFFFF"/>
           </a:solidFill>
           <a:ln w="19050">
             <a:solidFill>
-              <a:srgbClr val="8B5CF6"/>
+              <a:srgbClr val="7C3AED"/>
             </a:solidFill>
           </a:ln>
         </p:spPr>
@@ -5628,7 +5628,7 @@
             <a:pPr algn="ctr">
               <a:defRPr sz="1300" b="1">
                 <a:solidFill>
-                  <a:srgbClr val="FFFFFF"/>
+                  <a:srgbClr val="0F172A"/>
                 </a:solidFill>
                 <a:latin typeface="Arial"/>
               </a:defRPr>
@@ -5644,7 +5644,7 @@
               </a:spcBef>
               <a:defRPr sz="1050">
                 <a:solidFill>
-                  <a:srgbClr val="CBD5E1"/>
+                  <a:srgbClr val="475569"/>
                 </a:solidFill>
                 <a:latin typeface="Arial"/>
               </a:defRPr>
@@ -5712,7 +5712,7 @@
             <a:avLst/>
           </a:prstGeom>
           <a:solidFill>
-            <a:srgbClr val="0A0F1D"/>
+            <a:srgbClr val="F8FAFC"/>
           </a:solidFill>
           <a:ln>
             <a:noFill/>
@@ -5765,7 +5765,7 @@
             <a:pPr>
               <a:defRPr sz="1100" b="1">
                 <a:solidFill>
-                  <a:srgbClr val="10B981"/>
+                  <a:srgbClr val="059669"/>
                 </a:solidFill>
                 <a:latin typeface="Arial"/>
               </a:defRPr>
@@ -5801,7 +5801,7 @@
             <a:pPr>
               <a:defRPr sz="2600" b="1">
                 <a:solidFill>
-                  <a:srgbClr val="FFFFFF"/>
+                  <a:srgbClr val="0F172A"/>
                 </a:solidFill>
                 <a:latin typeface="Arial"/>
               </a:defRPr>
@@ -5837,7 +5837,7 @@
             <a:pPr>
               <a:defRPr sz="1200">
                 <a:solidFill>
-                  <a:srgbClr val="94A3B8"/>
+                  <a:srgbClr val="64748B"/>
                 </a:solidFill>
                 <a:latin typeface="Arial"/>
               </a:defRPr>
@@ -5863,11 +5863,11 @@
             <a:avLst/>
           </a:prstGeom>
           <a:solidFill>
-            <a:srgbClr val="131B2E"/>
+            <a:srgbClr val="FFFFFF"/>
           </a:solidFill>
           <a:ln w="19050">
             <a:solidFill>
-              <a:srgbClr val="10B981"/>
+              <a:srgbClr val="059669"/>
             </a:solidFill>
           </a:ln>
         </p:spPr>
@@ -5892,7 +5892,7 @@
             <a:pPr algn="ctr">
               <a:defRPr sz="1800" b="1">
                 <a:solidFill>
-                  <a:srgbClr val="10B981"/>
+                  <a:srgbClr val="059669"/>
                 </a:solidFill>
                 <a:latin typeface="Arial"/>
               </a:defRPr>
@@ -5905,7 +5905,7 @@
             <a:pPr>
               <a:defRPr sz="1300" b="1">
                 <a:solidFill>
-                  <a:srgbClr val="FFFFFF"/>
+                  <a:srgbClr val="0F172A"/>
                 </a:solidFill>
                 <a:latin typeface="Arial"/>
               </a:defRPr>
@@ -5921,7 +5921,7 @@
               </a:spcBef>
               <a:defRPr sz="1050">
                 <a:solidFill>
-                  <a:srgbClr val="CBD5E1"/>
+                  <a:srgbClr val="475569"/>
                 </a:solidFill>
                 <a:latin typeface="Arial"/>
               </a:defRPr>
@@ -5947,11 +5947,11 @@
             <a:avLst/>
           </a:prstGeom>
           <a:solidFill>
-            <a:srgbClr val="131B2E"/>
+            <a:srgbClr val="FFFFFF"/>
           </a:solidFill>
           <a:ln w="19050">
             <a:solidFill>
-              <a:srgbClr val="6366F1"/>
+              <a:srgbClr val="4F46E5"/>
             </a:solidFill>
           </a:ln>
         </p:spPr>
@@ -5976,7 +5976,7 @@
             <a:pPr algn="ctr">
               <a:defRPr sz="1800" b="1">
                 <a:solidFill>
-                  <a:srgbClr val="6366F1"/>
+                  <a:srgbClr val="4F46E5"/>
                 </a:solidFill>
                 <a:latin typeface="Arial"/>
               </a:defRPr>
@@ -5989,7 +5989,7 @@
             <a:pPr>
               <a:defRPr sz="1300" b="1">
                 <a:solidFill>
-                  <a:srgbClr val="FFFFFF"/>
+                  <a:srgbClr val="0F172A"/>
                 </a:solidFill>
                 <a:latin typeface="Arial"/>
               </a:defRPr>
@@ -6005,7 +6005,7 @@
               </a:spcBef>
               <a:defRPr sz="1050">
                 <a:solidFill>
-                  <a:srgbClr val="CBD5E1"/>
+                  <a:srgbClr val="475569"/>
                 </a:solidFill>
                 <a:latin typeface="Arial"/>
               </a:defRPr>
@@ -6031,11 +6031,11 @@
             <a:avLst/>
           </a:prstGeom>
           <a:solidFill>
-            <a:srgbClr val="131B2E"/>
+            <a:srgbClr val="FFFFFF"/>
           </a:solidFill>
           <a:ln w="19050">
             <a:solidFill>
-              <a:srgbClr val="06B6D4"/>
+              <a:srgbClr val="0284C7"/>
             </a:solidFill>
           </a:ln>
         </p:spPr>
@@ -6060,7 +6060,7 @@
             <a:pPr algn="ctr">
               <a:defRPr sz="1800" b="1">
                 <a:solidFill>
-                  <a:srgbClr val="06B6D4"/>
+                  <a:srgbClr val="0284C7"/>
                 </a:solidFill>
                 <a:latin typeface="Arial"/>
               </a:defRPr>
@@ -6073,7 +6073,7 @@
             <a:pPr>
               <a:defRPr sz="1300" b="1">
                 <a:solidFill>
-                  <a:srgbClr val="FFFFFF"/>
+                  <a:srgbClr val="0F172A"/>
                 </a:solidFill>
                 <a:latin typeface="Arial"/>
               </a:defRPr>
@@ -6089,7 +6089,7 @@
               </a:spcBef>
               <a:defRPr sz="1050">
                 <a:solidFill>
-                  <a:srgbClr val="CBD5E1"/>
+                  <a:srgbClr val="475569"/>
                 </a:solidFill>
                 <a:latin typeface="Arial"/>
               </a:defRPr>
@@ -6115,11 +6115,11 @@
             <a:avLst/>
           </a:prstGeom>
           <a:solidFill>
-            <a:srgbClr val="131B2E"/>
+            <a:srgbClr val="FFFFFF"/>
           </a:solidFill>
           <a:ln w="19050">
             <a:solidFill>
-              <a:srgbClr val="8B5CF6"/>
+              <a:srgbClr val="7C3AED"/>
             </a:solidFill>
           </a:ln>
         </p:spPr>
@@ -6144,7 +6144,7 @@
             <a:pPr algn="ctr">
               <a:defRPr sz="1800" b="1">
                 <a:solidFill>
-                  <a:srgbClr val="8B5CF6"/>
+                  <a:srgbClr val="7C3AED"/>
                 </a:solidFill>
                 <a:latin typeface="Arial"/>
               </a:defRPr>
@@ -6157,7 +6157,7 @@
             <a:pPr>
               <a:defRPr sz="1300" b="1">
                 <a:solidFill>
-                  <a:srgbClr val="FFFFFF"/>
+                  <a:srgbClr val="0F172A"/>
                 </a:solidFill>
                 <a:latin typeface="Arial"/>
               </a:defRPr>
@@ -6173,7 +6173,7 @@
               </a:spcBef>
               <a:defRPr sz="1050">
                 <a:solidFill>
-                  <a:srgbClr val="CBD5E1"/>
+                  <a:srgbClr val="475569"/>
                 </a:solidFill>
                 <a:latin typeface="Arial"/>
               </a:defRPr>
@@ -6241,7 +6241,7 @@
             <a:avLst/>
           </a:prstGeom>
           <a:solidFill>
-            <a:srgbClr val="0A0F1D"/>
+            <a:srgbClr val="F8FAFC"/>
           </a:solidFill>
           <a:ln>
             <a:noFill/>
@@ -6284,11 +6284,11 @@
             <a:avLst/>
           </a:prstGeom>
           <a:solidFill>
-            <a:srgbClr val="131B2E"/>
+            <a:srgbClr val="FFFFFF"/>
           </a:solidFill>
           <a:ln w="25400">
             <a:solidFill>
-              <a:srgbClr val="6366F1"/>
+              <a:srgbClr val="4F46E5"/>
             </a:solidFill>
           </a:ln>
         </p:spPr>
@@ -6313,7 +6313,7 @@
             <a:pPr algn="ctr">
               <a:defRPr sz="1300" b="1">
                 <a:solidFill>
-                  <a:srgbClr val="06B6D4"/>
+                  <a:srgbClr val="0284C7"/>
                 </a:solidFill>
                 <a:latin typeface="Arial"/>
               </a:defRPr>
@@ -6329,7 +6329,7 @@
               </a:spcBef>
               <a:defRPr sz="4600" b="1">
                 <a:solidFill>
-                  <a:srgbClr val="FFFFFF"/>
+                  <a:srgbClr val="0F172A"/>
                 </a:solidFill>
                 <a:latin typeface="Arial"/>
               </a:defRPr>
@@ -6345,7 +6345,7 @@
               </a:spcBef>
               <a:defRPr sz="2000">
                 <a:solidFill>
-                  <a:srgbClr val="6366F1"/>
+                  <a:srgbClr val="4F46E5"/>
                 </a:solidFill>
                 <a:latin typeface="Arial"/>
               </a:defRPr>
@@ -6361,7 +6361,7 @@
               </a:spcBef>
               <a:defRPr sz="1400" b="1">
                 <a:solidFill>
-                  <a:srgbClr val="CBD5E1"/>
+                  <a:srgbClr val="0F172A"/>
                 </a:solidFill>
                 <a:latin typeface="Arial"/>
               </a:defRPr>
@@ -6381,7 +6381,7 @@
               </a:spcBef>
               <a:defRPr sz="1200">
                 <a:solidFill>
-                  <a:srgbClr val="10B981"/>
+                  <a:srgbClr val="059669"/>
                 </a:solidFill>
                 <a:latin typeface="Arial"/>
               </a:defRPr>

--- a/public/Vyapar_2.0_Presentation.pptx
+++ b/public/Vyapar_2.0_Presentation.pptx
@@ -6277,8 +6277,8 @@
         </p:nvSpPr>
         <p:spPr>
           <a:xfrm>
-            <a:off x="1097280" y="914400"/>
-            <a:ext cx="9966960" cy="5029200"/>
+            <a:off x="731520" y="731520"/>
+            <a:ext cx="6858000" cy="5394960"/>
           </a:xfrm>
           <a:prstGeom prst="roundRect">
             <a:avLst/>
@@ -6286,7 +6286,7 @@
           <a:solidFill>
             <a:srgbClr val="FFFFFF"/>
           </a:solidFill>
-          <a:ln w="25400">
+          <a:ln w="19050">
             <a:solidFill>
               <a:srgbClr val="4F46E5"/>
             </a:solidFill>
@@ -6307,11 +6307,11 @@
           </a:fontRef>
         </p:style>
         <p:txBody>
-          <a:bodyPr rtlCol="0" anchor="ctr" wrap="square" lIns="548640" rIns="548640" tIns="365760"/>
+          <a:bodyPr rtlCol="0" anchor="ctr" wrap="square" lIns="457200" rIns="457200" tIns="365760"/>
           <a:lstStyle/>
           <a:p>
             <a:pPr algn="ctr">
-              <a:defRPr sz="1300" b="1">
+              <a:defRPr sz="1200" b="1">
                 <a:solidFill>
                   <a:srgbClr val="0284C7"/>
                 </a:solidFill>
@@ -6323,27 +6323,27 @@
             </a:r>
           </a:p>
           <a:p>
-            <a:pPr algn="ctr">
-              <a:spcBef>
-                <a:spcPts val="800"/>
-              </a:spcBef>
-              <a:defRPr sz="4600" b="1">
-                <a:solidFill>
-                  <a:srgbClr val="0F172A"/>
-                </a:solidFill>
-                <a:latin typeface="Arial"/>
-              </a:defRPr>
-            </a:pPr>
-            <a:r>
-              <a:t>Thank You!</a:t>
-            </a:r>
-          </a:p>
-          <a:p>
-            <a:pPr algn="ctr">
+            <a:pPr>
               <a:spcBef>
                 <a:spcPts val="600"/>
               </a:spcBef>
-              <a:defRPr sz="2000">
+              <a:defRPr sz="4400" b="1">
+                <a:solidFill>
+                  <a:srgbClr val="0F172A"/>
+                </a:solidFill>
+                <a:latin typeface="Arial"/>
+              </a:defRPr>
+            </a:pPr>
+            <a:r>
+              <a:t>Thank You!</a:t>
+            </a:r>
+          </a:p>
+          <a:p>
+            <a:pPr>
+              <a:spcBef>
+                <a:spcPts val="400"/>
+              </a:spcBef>
+              <a:defRPr sz="1800">
                 <a:solidFill>
                   <a:srgbClr val="4F46E5"/>
                 </a:solidFill>
@@ -6352,14 +6352,177 @@
             </a:pPr>
             <a:r>
               <a:t>Questions &amp; Live Demonstration</a:t>
+            </a:r>
+          </a:p>
+          <a:p>
+            <a:pPr>
+              <a:spcBef>
+                <a:spcPts val="1600"/>
+              </a:spcBef>
+              <a:defRPr sz="1300" b="1">
+                <a:solidFill>
+                  <a:srgbClr val="0F172A"/>
+                </a:solidFill>
+                <a:latin typeface="Arial"/>
+              </a:defRPr>
+            </a:pPr>
+            <a:r>
+              <a:t>Project Team:</a:t>
+            </a:r>
+            <a:br/>
+            <a:r>
+              <a:t>01 - Pranali Bhagat   |   06 - Hrutuja Champanerkar</a:t>
+            </a:r>
+            <a:br/>
+            <a:r>
+              <a:t>31 - Mayur Pandav   |   37 - Mol Patil</a:t>
+            </a:r>
+          </a:p>
+          <a:p>
+            <a:pPr>
+              <a:spcBef>
+                <a:spcPts val="1400"/>
+              </a:spcBef>
+              <a:defRPr sz="1150">
+                <a:solidFill>
+                  <a:srgbClr val="059669"/>
+                </a:solidFill>
+                <a:latin typeface="Arial"/>
+              </a:defRPr>
+            </a:pPr>
+            <a:r>
+              <a:t>• Live App: http://localhost:5173</a:t>
+            </a:r>
+            <a:br/>
+            <a:r>
+              <a:t>• Live GPS Tracking: http://localhost:5173/track/ORD-TRACK-748490</a:t>
+            </a:r>
+            <a:br/>
+            <a:r>
+              <a:t>• Merchant UPI ID: mayurpandav128@okhdfcbank</a:t>
+            </a:r>
+          </a:p>
+        </p:txBody>
+      </p:sp>
+      <p:sp>
+        <p:nvSpPr>
+          <p:cNvPr id="4" name="Rounded Rectangle 3"/>
+          <p:cNvSpPr/>
+          <p:nvPr/>
+        </p:nvSpPr>
+        <p:spPr>
+          <a:xfrm>
+            <a:off x="7863840" y="731520"/>
+            <a:ext cx="3566160" cy="5394960"/>
+          </a:xfrm>
+          <a:prstGeom prst="roundRect">
+            <a:avLst/>
+          </a:prstGeom>
+          <a:solidFill>
+            <a:srgbClr val="FFFFFF"/>
+          </a:solidFill>
+          <a:ln w="19050">
+            <a:solidFill>
+              <a:srgbClr val="059669"/>
+            </a:solidFill>
+          </a:ln>
+        </p:spPr>
+        <p:style>
+          <a:lnRef idx="1">
+            <a:schemeClr val="accent1"/>
+          </a:lnRef>
+          <a:fillRef idx="3">
+            <a:schemeClr val="accent1"/>
+          </a:fillRef>
+          <a:effectRef idx="2">
+            <a:schemeClr val="accent1"/>
+          </a:effectRef>
+          <a:fontRef idx="minor">
+            <a:schemeClr val="lt1"/>
+          </a:fontRef>
+        </p:style>
+        <p:txBody>
+          <a:bodyPr rtlCol="0" anchor="ctr" wrap="square" lIns="274320" rIns="274320" tIns="320040"/>
+          <a:lstStyle/>
+          <a:p>
+            <a:pPr algn="ctr">
+              <a:defRPr sz="1200" b="1">
+                <a:solidFill>
+                  <a:srgbClr val="059669"/>
+                </a:solidFill>
+                <a:latin typeface="Arial"/>
+              </a:defRPr>
+            </a:pPr>
+            <a:r>
+              <a:t>📲 LIVE UPI SCANNER</a:t>
             </a:r>
           </a:p>
           <a:p>
             <a:pPr algn="ctr">
               <a:spcBef>
-                <a:spcPts val="2200"/>
+                <a:spcPts val="200"/>
               </a:spcBef>
-              <a:defRPr sz="1400" b="1">
+              <a:defRPr sz="1000">
+                <a:solidFill>
+                  <a:srgbClr val="475569"/>
+                </a:solidFill>
+                <a:latin typeface="Arial"/>
+              </a:defRPr>
+            </a:pPr>
+            <a:r>
+              <a:t>Scan to Test Real Settlement</a:t>
+            </a:r>
+          </a:p>
+        </p:txBody>
+      </p:sp>
+      <p:pic>
+        <p:nvPicPr>
+          <p:cNvPr id="5" name="Picture 4" descr="upi_qr.png"/>
+          <p:cNvPicPr>
+            <a:picLocks noChangeAspect="1"/>
+          </p:cNvPicPr>
+          <p:nvPr/>
+        </p:nvPicPr>
+        <p:blipFill>
+          <a:blip r:embed="rId2"/>
+          <a:stretch>
+            <a:fillRect/>
+          </a:stretch>
+        </p:blipFill>
+        <p:spPr>
+          <a:xfrm>
+            <a:off x="8321040" y="1508760"/>
+            <a:ext cx="2651760" cy="3022504"/>
+          </a:xfrm>
+          <a:prstGeom prst="rect">
+            <a:avLst/>
+          </a:prstGeom>
+        </p:spPr>
+      </p:pic>
+      <p:sp>
+        <p:nvSpPr>
+          <p:cNvPr id="6" name="TextBox 5"/>
+          <p:cNvSpPr txBox="1"/>
+          <p:nvPr/>
+        </p:nvSpPr>
+        <p:spPr>
+          <a:xfrm>
+            <a:off x="7955279" y="4572000"/>
+            <a:ext cx="3383280" cy="1371600"/>
+          </a:xfrm>
+          <a:prstGeom prst="rect">
+            <a:avLst/>
+          </a:prstGeom>
+          <a:noFill/>
+        </p:spPr>
+        <p:txBody>
+          <a:bodyPr wrap="square">
+            <a:spAutoFit/>
+          </a:bodyPr>
+          <a:lstStyle/>
+          <a:p>
+            <a:pPr algn="ctr">
+              <a:defRPr sz="1050" b="1">
                 <a:solidFill>
                   <a:srgbClr val="0F172A"/>
                 </a:solidFill>
@@ -6367,27 +6530,23 @@
               </a:defRPr>
             </a:pPr>
             <a:r>
-              <a:t>Project Team:</a:t>
-            </a:r>
-            <a:br/>
-            <a:r>
-              <a:t>01 - Pranali Bhagat   |   06 - Hrutuja Champanerkar   |   31 - Mayur Pandav   |   37 - Mol Patil</a:t>
+              <a:t>UPI ID: mayurpandav128@okhdfcbank</a:t>
             </a:r>
           </a:p>
           <a:p>
             <a:pPr algn="ctr">
               <a:spcBef>
-                <a:spcPts val="1800"/>
+                <a:spcPts val="300"/>
               </a:spcBef>
-              <a:defRPr sz="1200">
-                <a:solidFill>
-                  <a:srgbClr val="059669"/>
-                </a:solidFill>
-                <a:latin typeface="Arial"/>
-              </a:defRPr>
-            </a:pPr>
-            <a:r>
-              <a:t>Live App: http://localhost:5173  •  Live GPS Portal: http://localhost:5173/track/ORD-TRACK-748490</a:t>
+              <a:defRPr sz="950" b="1">
+                <a:solidFill>
+                  <a:srgbClr val="4F46E5"/>
+                </a:solidFill>
+                <a:latin typeface="Arial"/>
+              </a:defRPr>
+            </a:pPr>
+            <a:r>
+              <a:t>⚡ Google Pay • PhonePe • Paytm • BHIM</a:t>
             </a:r>
           </a:p>
         </p:txBody>
